--- a/docs/sales/Табыс-презентация.pptx
+++ b/docs/sales/Табыс-презентация.pptx
@@ -16,9 +16,10 @@
     <p:sldId id="264" r:id="rId10"/>
     <p:sldId id="265" r:id="rId11"/>
     <p:sldId id="266" r:id="rId12"/>
+    <p:sldId id="267" r:id="rId13"/>
   </p:sldIdLst>
   <p:notesMasterIdLst>
-    <p:notesMasterId r:id="rId13"/>
+    <p:notesMasterId r:id="rId14"/>
   </p:notesMasterIdLst>
   <p:sldSz cx="9144000" cy="5143500"/>
   <p:notesSz cx="5143500" cy="9144000"/>
@@ -138,90 +139,7 @@
               <c:strCache>
                 <c:ptCount val="1"/>
                 <c:pt idx="0">
-                  <c:v>Негізгі тариф</c:v>
-                </c:pt>
-              </c:strCache>
-            </c:strRef>
-          </c:tx>
-          <c:spPr>
-            <a:solidFill>
-              <a:srgbClr val="C9A227"/>
-            </a:solidFill>
-            <a:effectLst/>
-          </c:spPr>
-          <c:invertIfNegative val="0"/>
-          <c:dLbls>
-            <c:numFmt formatCode="#,##0" sourceLinked="0"/>
-            <c:txPr>
-              <a:bodyPr/>
-              <a:lstStyle/>
-              <a:p>
-                <a:pPr>
-                  <a:defRPr b="0" i="0" strike="noStrike" sz="1000" u="none">
-                    <a:solidFill>
-                      <a:srgbClr val="1A1A1A"/>
-                    </a:solidFill>
-                    <a:latin typeface="Arial"/>
-                  </a:defRPr>
-                </a:pPr>
-              </a:p>
-            </c:txPr>
-            <c:showLegendKey val="0"/>
-            <c:showVal val="1"/>
-            <c:showCatName val="0"/>
-            <c:showSerName val="0"/>
-            <c:showPercent val="0"/>
-            <c:showBubbleSize val="0"/>
-            <c:showLeaderLines val="0"/>
-          </c:dLbls>
-          <c:cat>
-            <c:multiLvlStrRef>
-              <c:f>Sheet1!$A$2:$A$4</c:f>
-              <c:multiLvlStrCache>
-                <c:ptCount val="3"/>
-                <c:lvl>
-                  <c:pt idx="0">
-                    <c:v>Табыс</c:v>
-                  </c:pt>
-                  <c:pt idx="1">
-                    <c:v>UMAG</c:v>
-                  </c:pt>
-                  <c:pt idx="2">
-                    <c:v>Wipon</c:v>
-                  </c:pt>
-                </c:lvl>
-              </c:multiLvlStrCache>
-            </c:multiLvlStrRef>
-          </c:cat>
-          <c:val>
-            <c:numRef>
-              <c:f>Sheet1!$B$2:$B$4</c:f>
-              <c:numCache>
-                <c:formatCode>General</c:formatCode>
-                <c:ptCount val="3"/>
-                <c:pt idx="0">
-                  <c:v>6900</c:v>
-                </c:pt>
-                <c:pt idx="1">
-                  <c:v>8800</c:v>
-                </c:pt>
-                <c:pt idx="2">
-                  <c:v>15000</c:v>
-                </c:pt>
-              </c:numCache>
-            </c:numRef>
-          </c:val>
-        </c:ser>
-        <c:ser>
-          <c:idx val="1"/>
-          <c:order val="1"/>
-          <c:tx>
-            <c:strRef>
-              <c:f>Sheet1!$C$1</c:f>
-              <c:strCache>
-                <c:ptCount val="1"/>
-                <c:pt idx="0">
-                  <c:v>Толық тариф</c:v>
+                  <c:v>Бірінші жыл, барлығы</c:v>
                 </c:pt>
               </c:strCache>
             </c:strRef>
@@ -257,6 +175,39 @@
             <c:showBubbleSize val="0"/>
             <c:showLeaderLines val="0"/>
           </c:dLbls>
+          <c:dPt>
+            <c:idx val="0"/>
+            <c:invertIfNegative val="0"/>
+            <c:bubble3D val="0"/>
+            <c:spPr>
+              <a:solidFill>
+                <a:srgbClr val="1B6B4A"/>
+              </a:solidFill>
+              <a:effectLst/>
+            </c:spPr>
+          </c:dPt>
+          <c:dPt>
+            <c:idx val="1"/>
+            <c:invertIfNegative val="0"/>
+            <c:bubble3D val="0"/>
+            <c:spPr>
+              <a:solidFill>
+                <a:srgbClr val="C9A227"/>
+              </a:solidFill>
+              <a:effectLst/>
+            </c:spPr>
+          </c:dPt>
+          <c:dPt>
+            <c:idx val="2"/>
+            <c:invertIfNegative val="0"/>
+            <c:bubble3D val="0"/>
+            <c:spPr>
+              <a:solidFill>
+                <a:srgbClr val="1B6B4A"/>
+              </a:solidFill>
+              <a:effectLst/>
+            </c:spPr>
+          </c:dPt>
           <c:cat>
             <c:multiLvlStrRef>
               <c:f>Sheet1!$A$2:$A$4</c:f>
@@ -278,18 +229,18 @@
           </c:cat>
           <c:val>
             <c:numRef>
-              <c:f>Sheet1!$C$2:$C$4</c:f>
+              <c:f>Sheet1!$B$2:$B$4</c:f>
               <c:numCache>
                 <c:formatCode>General</c:formatCode>
                 <c:ptCount val="3"/>
                 <c:pt idx="0">
-                  <c:v>14900</c:v>
+                  <c:v>198800</c:v>
                 </c:pt>
                 <c:pt idx="1">
-                  <c:v>19900</c:v>
+                  <c:v>268800</c:v>
                 </c:pt>
                 <c:pt idx="2">
-                  <c:v>22500</c:v>
+                  <c:v>300000</c:v>
                 </c:pt>
               </c:numCache>
             </c:numRef>
@@ -424,20 +375,6 @@
         <a:effectLst/>
       </c:spPr>
     </c:plotArea>
-    <c:legend>
-      <c:legendPos val="b"/>
-      <c:overlay val="0"/>
-      <c:txPr>
-        <a:bodyPr/>
-        <a:lstStyle/>
-        <a:p>
-          <a:pPr>
-            <a:defRPr sz="1100">      </a:defRPr>
-          </a:pPr>
-          <a:endParaRPr lang="en-US"/>
-        </a:p>
-      </c:txPr>
-    </c:legend>
     <c:plotVisOnly val="1"/>
     <c:dispBlanksAs val="span"/>
   </c:chart>
@@ -937,7 +874,7 @@
           <a:p>
             <a:r>
               <a:rPr lang="en-US" dirty="0"/>
-              <a:t>Серіктес — жергілікті адам. Ол дүкенге келеді, орнатады, оқытады.</a:t>
+              <a:t>Жылдық төлем: 10 ай бағасына 12 ай. Старт 69 000, Стандарт 149 000 жылына.</a:t>
             </a:r>
             <a:endParaRPr lang="en-US" dirty="0"/>
           </a:p>
@@ -1025,7 +962,7 @@
           <a:p>
             <a:r>
               <a:rPr lang="en-US" dirty="0"/>
-              <a:t>Байланыс: телефон, WhatsApp, Telegram — серіктес нөмірін қосыңыз.</a:t>
+              <a:t>Серіктес — жергілікті адам. Ол дүкенге келеді, орнатады, оқытады.</a:t>
             </a:r>
             <a:endParaRPr lang="en-US" dirty="0"/>
           </a:p>
@@ -1049,6 +986,94 @@
             <a:fld id="{F7021451-1387-4CA6-816F-3879F97B5CBC}" type="slidenum">
               <a:rPr lang="en-US"/>
               <a:t>11</a:t>
+            </a:fld>
+            <a:endParaRPr lang="en-US"/>
+          </a:p>
+        </p:txBody>
+      </p:sp>
+    </p:spTree>
+    <p:extLst>
+      <p:ext uri="{BB962C8B-B14F-4D97-AF65-F5344CB8AC3E}">
+        <p14:creationId xmlns:p14="http://schemas.microsoft.com/office/powerpoint/2010/main" val="1024086991"/>
+      </p:ext>
+    </p:extLst>
+  </p:cSld>
+  <p:clrMapOvr>
+    <a:masterClrMapping/>
+  </p:clrMapOvr>
+</p:notes>
+</file>
+
+<file path=ppt/notesSlides/notesSlide12.xml><?xml version="1.0" encoding="utf-8"?>
+<p:notes xmlns:a="http://schemas.openxmlformats.org/drawingml/2006/main" xmlns:r="http://schemas.openxmlformats.org/officeDocument/2006/relationships" xmlns:p="http://schemas.openxmlformats.org/presentationml/2006/main">
+  <p:cSld>
+    <p:spTree>
+      <p:nvGrpSpPr>
+        <p:cNvPr id="1" name=""/>
+        <p:cNvGrpSpPr/>
+        <p:nvPr/>
+      </p:nvGrpSpPr>
+      <p:grpSpPr>
+        <a:xfrm>
+          <a:off x="0" y="0"/>
+          <a:ext cx="0" cy="0"/>
+          <a:chOff x="0" y="0"/>
+          <a:chExt cx="0" cy="0"/>
+        </a:xfrm>
+      </p:grpSpPr>
+      <p:sp>
+        <p:nvSpPr>
+          <p:cNvPr id="2" name="Slide Image Placeholder 1"/>
+          <p:cNvSpPr>
+            <a:spLocks noGrp="1" noRot="1" noChangeAspect="1"/>
+          </p:cNvSpPr>
+          <p:nvPr>
+            <p:ph type="sldImg"/>
+          </p:nvPr>
+        </p:nvSpPr>
+        <p:spPr/>
+      </p:sp>
+      <p:sp>
+        <p:nvSpPr>
+          <p:cNvPr id="3" name="Notes Placeholder 2"/>
+          <p:cNvSpPr>
+            <a:spLocks noGrp="1"/>
+          </p:cNvSpPr>
+          <p:nvPr>
+            <p:ph type="body" idx="1"/>
+          </p:nvPr>
+        </p:nvSpPr>
+        <p:spPr/>
+        <p:txBody>
+          <a:bodyPr/>
+          <a:lstStyle/>
+          <a:p>
+            <a:r>
+              <a:rPr lang="en-US" dirty="0"/>
+              <a:t>Байланыс: телефон, WhatsApp, Telegram — серіктес нөмірін қосыңыз.</a:t>
+            </a:r>
+            <a:endParaRPr lang="en-US" dirty="0"/>
+          </a:p>
+        </p:txBody>
+      </p:sp>
+      <p:sp>
+        <p:nvSpPr>
+          <p:cNvPr id="4" name="Slide Number Placeholder 3"/>
+          <p:cNvSpPr>
+            <a:spLocks noGrp="1"/>
+          </p:cNvSpPr>
+          <p:nvPr>
+            <p:ph type="sldNum" sz="quarter" idx="10"/>
+          </p:nvPr>
+        </p:nvSpPr>
+        <p:spPr/>
+        <p:txBody>
+          <a:bodyPr/>
+          <a:lstStyle/>
+          <a:p>
+            <a:fld id="{F7021451-1387-4CA6-816F-3879F97B5CBC}" type="slidenum">
+              <a:rPr lang="en-US"/>
+              <a:t>12</a:t>
             </a:fld>
             <a:endParaRPr lang="en-US"/>
           </a:p>
@@ -1113,7 +1138,7 @@
           <a:p>
             <a:r>
               <a:rPr lang="en-US" dirty="0"/>
-              <a:t>Әр дүкен иесі осы төрт сұрақпен күн сайын кездеседі.</a:t>
+              <a:t>Осы экранды көрсетіңіз. Дүкен иесі функция тізімін оқымайды — экранға қарап шешеді: кассирім істей ме, жоқ па.</a:t>
             </a:r>
             <a:endParaRPr lang="en-US" dirty="0"/>
           </a:p>
@@ -1201,7 +1226,7 @@
           <a:p>
             <a:r>
               <a:rPr lang="en-US" dirty="0"/>
-              <a:t>Касса Windows планшетінде немесе компьютерде. Сканер, таразы, чек принтері, ақша жәшігі қосылады.</a:t>
+              <a:t>Әр дүкен иесі осы төрт сұрақпен күн сайын кездеседі.</a:t>
             </a:r>
             <a:endParaRPr lang="en-US" dirty="0"/>
           </a:p>
@@ -1289,7 +1314,7 @@
           <a:p>
             <a:r>
               <a:rPr lang="en-US" dirty="0"/>
-              <a:t>690 автоматты тексеру — әр жаңарту алдында өтеді.</a:t>
+              <a:t>Касса Windows планшетінде немесе компьютерде. Сканер, таразы, чек принтері, ақша жәшігі қосылады.</a:t>
             </a:r>
             <a:endParaRPr lang="en-US" dirty="0"/>
           </a:p>
@@ -1377,7 +1402,7 @@
           <a:p>
             <a:r>
               <a:rPr lang="en-US" dirty="0"/>
-              <a:t>Барлық 21 бөлім Стандарт тарифінде. Старт тарифінде негізгі 8.</a:t>
+              <a:t>690 автоматты тексеру — әр жаңарту алдында өтеді.</a:t>
             </a:r>
             <a:endParaRPr lang="en-US" dirty="0"/>
           </a:p>
@@ -1465,7 +1490,7 @@
           <a:p>
             <a:r>
               <a:rPr lang="en-US" dirty="0"/>
-              <a:t>Бұл алты функция UMAG пен Wipon-да жоқ.</a:t>
+              <a:t>Барлық 21 бөлім Стандарт тарифінде. Старт тарифінде негізгі 8.</a:t>
             </a:r>
             <a:endParaRPr lang="en-US" dirty="0"/>
           </a:p>
@@ -1553,7 +1578,7 @@
           <a:p>
             <a:r>
               <a:rPr lang="en-US" dirty="0"/>
-              <a:t>Телефон қосымшасы — иесі үшін. Кассирге кассадағы бағдарлама.</a:t>
+              <a:t>Бұл алты функция UMAG пен Wipon-да жоқ.</a:t>
             </a:r>
             <a:endParaRPr lang="en-US" dirty="0"/>
           </a:p>
@@ -1641,7 +1666,7 @@
           <a:p>
             <a:r>
               <a:rPr lang="en-US" dirty="0"/>
-              <a:t>UMAG: Старт 8 800, Стандарт 19 900, орнату 30 000. Wipon: Lite 15 000, Standard 22 500 бөліп төлегенде. Дереккөз: umag.kz/tarify, docs.wipon.kz</a:t>
+              <a:t>Телефон қосымшасы — иесі үшін. Кассирге кассадағы бағдарлама.</a:t>
             </a:r>
             <a:endParaRPr lang="en-US" dirty="0"/>
           </a:p>
@@ -1729,7 +1754,7 @@
           <a:p>
             <a:r>
               <a:rPr lang="en-US" dirty="0"/>
-              <a:t>Жылдық төлем: 10 ай бағасына 12 ай. Старт 69 000, Стандарт 149 000 жылына.</a:t>
+              <a:t>UMAG: Старт 8 800, Стандарт 19 900, орнату 30 000. Wipon: Lite 15 000, Standard 22 500 бөліп төлегенде. Дереккөз: umag.kz/tarify, docs.wipon.kz</a:t>
             </a:r>
             <a:endParaRPr lang="en-US" dirty="0"/>
           </a:p>
@@ -2272,7 +2297,7 @@
                 <a:ea typeface="Calibri" pitchFamily="34" charset="-122"/>
                 <a:cs typeface="Calibri" pitchFamily="34" charset="-120"/>
               </a:rPr>
-              <a:t>Айына 6 900 ₸-ден · Орнату тегін · 14 күн сынақ</a:t>
+              <a:t>Айына 9 990 ₸-ден · Орнату 20 000 ₸ · 2 күн тегін сынақ</a:t>
             </a:r>
             <a:endParaRPr lang="en-US" sz="1400" dirty="0"/>
           </a:p>
@@ -2289,6 +2314,714 @@
 <file path=ppt/slides/slide10.xml><?xml version="1.0" encoding="utf-8"?>
 <p:sld xmlns:a="http://schemas.openxmlformats.org/drawingml/2006/main" xmlns:r="http://schemas.openxmlformats.org/officeDocument/2006/relationships" xmlns:p="http://schemas.openxmlformats.org/presentationml/2006/main">
   <p:cSld name="Slide 10">
+    <p:bg>
+      <p:bgPr>
+        <a:solidFill>
+          <a:srgbClr val="F4F6F3"/>
+        </a:solidFill>
+      </p:bgPr>
+    </p:bg>
+    <p:spTree>
+      <p:nvGrpSpPr>
+        <p:cNvPr id="1" name=""/>
+        <p:cNvGrpSpPr/>
+        <p:nvPr/>
+      </p:nvGrpSpPr>
+      <p:grpSpPr>
+        <a:xfrm>
+          <a:off x="0" y="0"/>
+          <a:ext cx="0" cy="0"/>
+          <a:chOff x="0" y="0"/>
+          <a:chExt cx="0" cy="0"/>
+        </a:xfrm>
+      </p:grpSpPr>
+      <p:sp>
+        <p:nvSpPr>
+          <p:cNvPr id="2" name="Text 0"/>
+          <p:cNvSpPr txBox="1"/>
+          <p:nvPr/>
+        </p:nvSpPr>
+        <p:spPr>
+          <a:xfrm>
+            <a:off x="548640" y="365760"/>
+            <a:ext cx="8229600" cy="640080"/>
+          </a:xfrm>
+          <a:prstGeom prst="rect">
+            <a:avLst/>
+          </a:prstGeom>
+          <a:noFill/>
+          <a:ln/>
+        </p:spPr>
+        <p:txBody>
+          <a:bodyPr wrap="square" lIns="0" tIns="0" rIns="0" bIns="0" rtlCol="0" anchor="ctr"/>
+          <a:lstStyle/>
+          <a:p>
+            <a:pPr indent="0" marL="0">
+              <a:buNone/>
+            </a:pPr>
+            <a:r>
+              <a:rPr lang="en-US" sz="3000" b="1" dirty="0">
+                <a:solidFill>
+                  <a:srgbClr val="0F3D2E"/>
+                </a:solidFill>
+                <a:latin typeface="Cambria" pitchFamily="34" charset="0"/>
+                <a:ea typeface="Cambria" pitchFamily="34" charset="-122"/>
+                <a:cs typeface="Cambria" pitchFamily="34" charset="-120"/>
+              </a:rPr>
+              <a:t>Тарифтер</a:t>
+            </a:r>
+            <a:endParaRPr lang="en-US" sz="3000" dirty="0"/>
+          </a:p>
+        </p:txBody>
+      </p:sp>
+      <p:sp>
+        <p:nvSpPr>
+          <p:cNvPr id="3" name="Shape 1"/>
+          <p:cNvSpPr/>
+          <p:nvPr/>
+        </p:nvSpPr>
+        <p:spPr>
+          <a:xfrm>
+            <a:off x="548640" y="1097280"/>
+            <a:ext cx="3931920" cy="3566160"/>
+          </a:xfrm>
+          <a:prstGeom prst="roundRect">
+            <a:avLst>
+              <a:gd name="adj" fmla="val 3077"/>
+            </a:avLst>
+          </a:prstGeom>
+          <a:solidFill>
+            <a:srgbClr val="FFFFFF"/>
+          </a:solidFill>
+          <a:ln w="12700">
+            <a:solidFill>
+              <a:srgbClr val="E8EFE9"/>
+            </a:solidFill>
+            <a:prstDash val="solid"/>
+          </a:ln>
+        </p:spPr>
+      </p:sp>
+      <p:sp>
+        <p:nvSpPr>
+          <p:cNvPr id="4" name="Text 2"/>
+          <p:cNvSpPr txBox="1"/>
+          <p:nvPr/>
+        </p:nvSpPr>
+        <p:spPr>
+          <a:xfrm>
+            <a:off x="822960" y="1280160"/>
+            <a:ext cx="3383280" cy="365760"/>
+          </a:xfrm>
+          <a:prstGeom prst="rect">
+            <a:avLst/>
+          </a:prstGeom>
+          <a:noFill/>
+          <a:ln/>
+        </p:spPr>
+        <p:txBody>
+          <a:bodyPr wrap="square" lIns="0" tIns="0" rIns="0" bIns="0" rtlCol="0" anchor="ctr"/>
+          <a:lstStyle/>
+          <a:p>
+            <a:pPr indent="0" marL="0">
+              <a:buNone/>
+            </a:pPr>
+            <a:r>
+              <a:rPr lang="en-US" sz="2000" b="1" dirty="0">
+                <a:solidFill>
+                  <a:srgbClr val="0F3D2E"/>
+                </a:solidFill>
+                <a:latin typeface="Calibri" pitchFamily="34" charset="0"/>
+                <a:ea typeface="Calibri" pitchFamily="34" charset="-122"/>
+                <a:cs typeface="Calibri" pitchFamily="34" charset="-120"/>
+              </a:rPr>
+              <a:t>Старт</a:t>
+            </a:r>
+            <a:endParaRPr lang="en-US" sz="2000" dirty="0"/>
+          </a:p>
+        </p:txBody>
+      </p:sp>
+      <p:sp>
+        <p:nvSpPr>
+          <p:cNvPr id="5" name="Text 3"/>
+          <p:cNvSpPr txBox="1"/>
+          <p:nvPr/>
+        </p:nvSpPr>
+        <p:spPr>
+          <a:xfrm>
+            <a:off x="822960" y="1645920"/>
+            <a:ext cx="3383280" cy="640080"/>
+          </a:xfrm>
+          <a:prstGeom prst="rect">
+            <a:avLst/>
+          </a:prstGeom>
+          <a:noFill/>
+          <a:ln/>
+        </p:spPr>
+        <p:txBody>
+          <a:bodyPr wrap="square" lIns="0" tIns="0" rIns="0" bIns="0" rtlCol="0" anchor="ctr"/>
+          <a:lstStyle/>
+          <a:p>
+            <a:pPr indent="0" marL="0">
+              <a:buNone/>
+            </a:pPr>
+            <a:r>
+              <a:rPr lang="en-US" sz="4000" b="1" dirty="0">
+                <a:solidFill>
+                  <a:srgbClr val="1B6B4A"/>
+                </a:solidFill>
+                <a:latin typeface="Cambria" pitchFamily="34" charset="0"/>
+                <a:ea typeface="Cambria" pitchFamily="34" charset="-122"/>
+                <a:cs typeface="Cambria" pitchFamily="34" charset="-120"/>
+              </a:rPr>
+              <a:t>9 990 ₸</a:t>
+            </a:r>
+            <a:endParaRPr lang="en-US" sz="4000" dirty="0"/>
+          </a:p>
+        </p:txBody>
+      </p:sp>
+      <p:sp>
+        <p:nvSpPr>
+          <p:cNvPr id="6" name="Text 4"/>
+          <p:cNvSpPr txBox="1"/>
+          <p:nvPr/>
+        </p:nvSpPr>
+        <p:spPr>
+          <a:xfrm>
+            <a:off x="822960" y="2286000"/>
+            <a:ext cx="3383280" cy="274320"/>
+          </a:xfrm>
+          <a:prstGeom prst="rect">
+            <a:avLst/>
+          </a:prstGeom>
+          <a:noFill/>
+          <a:ln/>
+        </p:spPr>
+        <p:txBody>
+          <a:bodyPr wrap="square" lIns="0" tIns="0" rIns="0" bIns="0" rtlCol="0" anchor="ctr"/>
+          <a:lstStyle/>
+          <a:p>
+            <a:pPr indent="0" marL="0">
+              <a:buNone/>
+            </a:pPr>
+            <a:r>
+              <a:rPr lang="en-US" sz="1200" dirty="0">
+                <a:solidFill>
+                  <a:srgbClr val="6B7770"/>
+                </a:solidFill>
+                <a:latin typeface="Calibri" pitchFamily="34" charset="0"/>
+                <a:ea typeface="Calibri" pitchFamily="34" charset="-122"/>
+                <a:cs typeface="Calibri" pitchFamily="34" charset="-120"/>
+              </a:rPr>
+              <a:t>айына · 1 дүкен, 1 касса</a:t>
+            </a:r>
+            <a:endParaRPr lang="en-US" sz="1200" dirty="0"/>
+          </a:p>
+        </p:txBody>
+      </p:sp>
+      <p:sp>
+        <p:nvSpPr>
+          <p:cNvPr id="7" name="Text 5"/>
+          <p:cNvSpPr txBox="1"/>
+          <p:nvPr/>
+        </p:nvSpPr>
+        <p:spPr>
+          <a:xfrm>
+            <a:off x="822960" y="2697480"/>
+            <a:ext cx="3383280" cy="1828800"/>
+          </a:xfrm>
+          <a:prstGeom prst="rect">
+            <a:avLst/>
+          </a:prstGeom>
+          <a:noFill/>
+          <a:ln/>
+        </p:spPr>
+        <p:txBody>
+          <a:bodyPr wrap="square" lIns="0" tIns="0" rIns="0" bIns="0" rtlCol="0" anchor="ctr"/>
+          <a:lstStyle/>
+          <a:p>
+            <a:pPr marL="342900" indent="-342900">
+              <a:spcAft>
+                <a:spcPts val="500"/>
+              </a:spcAft>
+              <a:buSzPct val="100000"/>
+              <a:buChar char="•"/>
+            </a:pPr>
+            <a:r>
+              <a:rPr lang="en-US" sz="1200" dirty="0">
+                <a:solidFill>
+                  <a:srgbClr val="1A1A1A"/>
+                </a:solidFill>
+                <a:latin typeface="Calibri" pitchFamily="34" charset="0"/>
+                <a:ea typeface="Calibri" pitchFamily="34" charset="-122"/>
+                <a:cs typeface="Calibri" pitchFamily="34" charset="-120"/>
+              </a:rPr>
+              <a:t>Касса: сатылым, қайтарым, ауысым</a:t>
+            </a:r>
+            <a:endParaRPr lang="en-US" sz="1200" dirty="0"/>
+          </a:p>
+          <a:p>
+            <a:pPr marL="342900" indent="-342900">
+              <a:spcAft>
+                <a:spcPts val="500"/>
+              </a:spcAft>
+              <a:buSzPct val="100000"/>
+              <a:buChar char="•"/>
+            </a:pPr>
+            <a:r>
+              <a:rPr lang="en-US" sz="1200" dirty="0">
+                <a:solidFill>
+                  <a:srgbClr val="1A1A1A"/>
+                </a:solidFill>
+                <a:latin typeface="Calibri" pitchFamily="34" charset="0"/>
+                <a:ea typeface="Calibri" pitchFamily="34" charset="-122"/>
+                <a:cs typeface="Calibri" pitchFamily="34" charset="-120"/>
+              </a:rPr>
+              <a:t>Тауарлар мен қойма</a:t>
+            </a:r>
+            <a:endParaRPr lang="en-US" sz="1200" dirty="0"/>
+          </a:p>
+          <a:p>
+            <a:pPr marL="342900" indent="-342900">
+              <a:spcAft>
+                <a:spcPts val="500"/>
+              </a:spcAft>
+              <a:buSzPct val="100000"/>
+              <a:buChar char="•"/>
+            </a:pPr>
+            <a:r>
+              <a:rPr lang="en-US" sz="1200" dirty="0">
+                <a:solidFill>
+                  <a:srgbClr val="1A1A1A"/>
+                </a:solidFill>
+                <a:latin typeface="Calibri" pitchFamily="34" charset="0"/>
+                <a:ea typeface="Calibri" pitchFamily="34" charset="-122"/>
+                <a:cs typeface="Calibri" pitchFamily="34" charset="-120"/>
+              </a:rPr>
+              <a:t>Есептер мен көрсеткіштер</a:t>
+            </a:r>
+            <a:endParaRPr lang="en-US" sz="1200" dirty="0"/>
+          </a:p>
+          <a:p>
+            <a:pPr marL="342900" indent="-342900">
+              <a:spcAft>
+                <a:spcPts val="500"/>
+              </a:spcAft>
+              <a:buSzPct val="100000"/>
+              <a:buChar char="•"/>
+            </a:pPr>
+            <a:r>
+              <a:rPr lang="en-US" sz="1200" dirty="0">
+                <a:solidFill>
+                  <a:srgbClr val="1A1A1A"/>
+                </a:solidFill>
+                <a:latin typeface="Calibri" pitchFamily="34" charset="0"/>
+                <a:ea typeface="Calibri" pitchFamily="34" charset="-122"/>
+                <a:cs typeface="Calibri" pitchFamily="34" charset="-120"/>
+              </a:rPr>
+              <a:t>Адалдық және қарыз</a:t>
+            </a:r>
+            <a:endParaRPr lang="en-US" sz="1200" dirty="0"/>
+          </a:p>
+          <a:p>
+            <a:pPr marL="342900" indent="-342900">
+              <a:spcAft>
+                <a:spcPts val="500"/>
+              </a:spcAft>
+              <a:buSzPct val="100000"/>
+              <a:buChar char="•"/>
+            </a:pPr>
+            <a:r>
+              <a:rPr lang="en-US" sz="1200" dirty="0">
+                <a:solidFill>
+                  <a:srgbClr val="1A1A1A"/>
+                </a:solidFill>
+                <a:latin typeface="Calibri" pitchFamily="34" charset="0"/>
+                <a:ea typeface="Calibri" pitchFamily="34" charset="-122"/>
+                <a:cs typeface="Calibri" pitchFamily="34" charset="-120"/>
+              </a:rPr>
+              <a:t>Телефон қосымшасы</a:t>
+            </a:r>
+            <a:endParaRPr lang="en-US" sz="1200" dirty="0"/>
+          </a:p>
+        </p:txBody>
+      </p:sp>
+      <p:sp>
+        <p:nvSpPr>
+          <p:cNvPr id="8" name="Shape 6"/>
+          <p:cNvSpPr/>
+          <p:nvPr/>
+        </p:nvSpPr>
+        <p:spPr>
+          <a:xfrm>
+            <a:off x="4663440" y="1097280"/>
+            <a:ext cx="3931920" cy="3566160"/>
+          </a:xfrm>
+          <a:prstGeom prst="roundRect">
+            <a:avLst>
+              <a:gd name="adj" fmla="val 3077"/>
+            </a:avLst>
+          </a:prstGeom>
+          <a:solidFill>
+            <a:srgbClr val="0F3D2E"/>
+          </a:solidFill>
+          <a:ln/>
+        </p:spPr>
+      </p:sp>
+      <p:sp>
+        <p:nvSpPr>
+          <p:cNvPr id="9" name="Shape 7"/>
+          <p:cNvSpPr/>
+          <p:nvPr/>
+        </p:nvSpPr>
+        <p:spPr>
+          <a:xfrm>
+            <a:off x="6766560" y="1234440"/>
+            <a:ext cx="1691640" cy="320040"/>
+          </a:xfrm>
+          <a:prstGeom prst="roundRect">
+            <a:avLst>
+              <a:gd name="adj" fmla="val 48571"/>
+            </a:avLst>
+          </a:prstGeom>
+          <a:solidFill>
+            <a:srgbClr val="C9A227"/>
+          </a:solidFill>
+          <a:ln/>
+        </p:spPr>
+      </p:sp>
+      <p:sp>
+        <p:nvSpPr>
+          <p:cNvPr id="10" name="Text 8"/>
+          <p:cNvSpPr txBox="1"/>
+          <p:nvPr/>
+        </p:nvSpPr>
+        <p:spPr>
+          <a:xfrm>
+            <a:off x="6766560" y="1234440"/>
+            <a:ext cx="1691640" cy="320040"/>
+          </a:xfrm>
+          <a:prstGeom prst="rect">
+            <a:avLst/>
+          </a:prstGeom>
+          <a:noFill/>
+          <a:ln/>
+        </p:spPr>
+        <p:txBody>
+          <a:bodyPr wrap="square" lIns="0" tIns="0" rIns="0" bIns="0" rtlCol="0" anchor="ctr"/>
+          <a:lstStyle/>
+          <a:p>
+            <a:pPr algn="ctr" indent="0" marL="0">
+              <a:buNone/>
+            </a:pPr>
+            <a:r>
+              <a:rPr lang="en-US" sz="1000" b="1" dirty="0">
+                <a:solidFill>
+                  <a:srgbClr val="0F3D2E"/>
+                </a:solidFill>
+                <a:latin typeface="Calibri" pitchFamily="34" charset="0"/>
+                <a:ea typeface="Calibri" pitchFamily="34" charset="-122"/>
+                <a:cs typeface="Calibri" pitchFamily="34" charset="-120"/>
+              </a:rPr>
+              <a:t>ҰСЫНАМЫЗ</a:t>
+            </a:r>
+            <a:endParaRPr lang="en-US" sz="1000" dirty="0"/>
+          </a:p>
+        </p:txBody>
+      </p:sp>
+      <p:sp>
+        <p:nvSpPr>
+          <p:cNvPr id="11" name="Text 9"/>
+          <p:cNvSpPr txBox="1"/>
+          <p:nvPr/>
+        </p:nvSpPr>
+        <p:spPr>
+          <a:xfrm>
+            <a:off x="4937760" y="1280160"/>
+            <a:ext cx="1828800" cy="365760"/>
+          </a:xfrm>
+          <a:prstGeom prst="rect">
+            <a:avLst/>
+          </a:prstGeom>
+          <a:noFill/>
+          <a:ln/>
+        </p:spPr>
+        <p:txBody>
+          <a:bodyPr wrap="square" lIns="0" tIns="0" rIns="0" bIns="0" rtlCol="0" anchor="ctr"/>
+          <a:lstStyle/>
+          <a:p>
+            <a:pPr indent="0" marL="0">
+              <a:buNone/>
+            </a:pPr>
+            <a:r>
+              <a:rPr lang="en-US" sz="2000" b="1" dirty="0">
+                <a:solidFill>
+                  <a:srgbClr val="FFFFFF"/>
+                </a:solidFill>
+                <a:latin typeface="Calibri" pitchFamily="34" charset="0"/>
+                <a:ea typeface="Calibri" pitchFamily="34" charset="-122"/>
+                <a:cs typeface="Calibri" pitchFamily="34" charset="-120"/>
+              </a:rPr>
+              <a:t>Стандарт</a:t>
+            </a:r>
+            <a:endParaRPr lang="en-US" sz="2000" dirty="0"/>
+          </a:p>
+        </p:txBody>
+      </p:sp>
+      <p:sp>
+        <p:nvSpPr>
+          <p:cNvPr id="12" name="Text 10"/>
+          <p:cNvSpPr txBox="1"/>
+          <p:nvPr/>
+        </p:nvSpPr>
+        <p:spPr>
+          <a:xfrm>
+            <a:off x="4937760" y="1645920"/>
+            <a:ext cx="3383280" cy="640080"/>
+          </a:xfrm>
+          <a:prstGeom prst="rect">
+            <a:avLst/>
+          </a:prstGeom>
+          <a:noFill/>
+          <a:ln/>
+        </p:spPr>
+        <p:txBody>
+          <a:bodyPr wrap="square" lIns="0" tIns="0" rIns="0" bIns="0" rtlCol="0" anchor="ctr"/>
+          <a:lstStyle/>
+          <a:p>
+            <a:pPr indent="0" marL="0">
+              <a:buNone/>
+            </a:pPr>
+            <a:r>
+              <a:rPr lang="en-US" sz="4000" b="1" dirty="0">
+                <a:solidFill>
+                  <a:srgbClr val="C9A227"/>
+                </a:solidFill>
+                <a:latin typeface="Cambria" pitchFamily="34" charset="0"/>
+                <a:ea typeface="Cambria" pitchFamily="34" charset="-122"/>
+                <a:cs typeface="Cambria" pitchFamily="34" charset="-120"/>
+              </a:rPr>
+              <a:t>14 900 ₸</a:t>
+            </a:r>
+            <a:endParaRPr lang="en-US" sz="4000" dirty="0"/>
+          </a:p>
+        </p:txBody>
+      </p:sp>
+      <p:sp>
+        <p:nvSpPr>
+          <p:cNvPr id="13" name="Text 11"/>
+          <p:cNvSpPr txBox="1"/>
+          <p:nvPr/>
+        </p:nvSpPr>
+        <p:spPr>
+          <a:xfrm>
+            <a:off x="4937760" y="2286000"/>
+            <a:ext cx="3383280" cy="274320"/>
+          </a:xfrm>
+          <a:prstGeom prst="rect">
+            <a:avLst/>
+          </a:prstGeom>
+          <a:noFill/>
+          <a:ln/>
+        </p:spPr>
+        <p:txBody>
+          <a:bodyPr wrap="square" lIns="0" tIns="0" rIns="0" bIns="0" rtlCol="0" anchor="ctr"/>
+          <a:lstStyle/>
+          <a:p>
+            <a:pPr indent="0" marL="0">
+              <a:buNone/>
+            </a:pPr>
+            <a:r>
+              <a:rPr lang="en-US" sz="1200" dirty="0">
+                <a:solidFill>
+                  <a:srgbClr val="B8C9BF"/>
+                </a:solidFill>
+                <a:latin typeface="Calibri" pitchFamily="34" charset="0"/>
+                <a:ea typeface="Calibri" pitchFamily="34" charset="-122"/>
+                <a:cs typeface="Calibri" pitchFamily="34" charset="-120"/>
+              </a:rPr>
+              <a:t>айына · 1 дүкен, кассалар шексіз</a:t>
+            </a:r>
+            <a:endParaRPr lang="en-US" sz="1200" dirty="0"/>
+          </a:p>
+        </p:txBody>
+      </p:sp>
+      <p:sp>
+        <p:nvSpPr>
+          <p:cNvPr id="14" name="Text 12"/>
+          <p:cNvSpPr txBox="1"/>
+          <p:nvPr/>
+        </p:nvSpPr>
+        <p:spPr>
+          <a:xfrm>
+            <a:off x="4937760" y="2697480"/>
+            <a:ext cx="3383280" cy="1828800"/>
+          </a:xfrm>
+          <a:prstGeom prst="rect">
+            <a:avLst/>
+          </a:prstGeom>
+          <a:noFill/>
+          <a:ln/>
+        </p:spPr>
+        <p:txBody>
+          <a:bodyPr wrap="square" lIns="0" tIns="0" rIns="0" bIns="0" rtlCol="0" anchor="ctr"/>
+          <a:lstStyle/>
+          <a:p>
+            <a:pPr marL="342900" indent="-342900">
+              <a:spcAft>
+                <a:spcPts val="500"/>
+              </a:spcAft>
+              <a:buSzPct val="100000"/>
+              <a:buChar char="•"/>
+            </a:pPr>
+            <a:r>
+              <a:rPr lang="en-US" sz="1200" dirty="0">
+                <a:solidFill>
+                  <a:srgbClr val="FFFFFF"/>
+                </a:solidFill>
+                <a:latin typeface="Calibri" pitchFamily="34" charset="0"/>
+                <a:ea typeface="Calibri" pitchFamily="34" charset="-122"/>
+                <a:cs typeface="Calibri" pitchFamily="34" charset="-120"/>
+              </a:rPr>
+              <a:t>Старттағының бәрі</a:t>
+            </a:r>
+            <a:endParaRPr lang="en-US" sz="1200" dirty="0"/>
+          </a:p>
+          <a:p>
+            <a:pPr marL="342900" indent="-342900">
+              <a:spcAft>
+                <a:spcPts val="500"/>
+              </a:spcAft>
+              <a:buSzPct val="100000"/>
+              <a:buChar char="•"/>
+            </a:pPr>
+            <a:r>
+              <a:rPr lang="en-US" sz="1200" dirty="0">
+                <a:solidFill>
+                  <a:srgbClr val="FFFFFF"/>
+                </a:solidFill>
+                <a:latin typeface="Calibri" pitchFamily="34" charset="0"/>
+                <a:ea typeface="Calibri" pitchFamily="34" charset="-122"/>
+                <a:cs typeface="Calibri" pitchFamily="34" charset="-120"/>
+              </a:rPr>
+              <a:t>AI: накладной, дауыспен түгендеу</a:t>
+            </a:r>
+            <a:endParaRPr lang="en-US" sz="1200" dirty="0"/>
+          </a:p>
+          <a:p>
+            <a:pPr marL="342900" indent="-342900">
+              <a:spcAft>
+                <a:spcPts val="500"/>
+              </a:spcAft>
+              <a:buSzPct val="100000"/>
+              <a:buChar char="•"/>
+            </a:pPr>
+            <a:r>
+              <a:rPr lang="en-US" sz="1200" dirty="0">
+                <a:solidFill>
+                  <a:srgbClr val="FFFFFF"/>
+                </a:solidFill>
+                <a:latin typeface="Calibri" pitchFamily="34" charset="0"/>
+                <a:ea typeface="Calibri" pitchFamily="34" charset="-122"/>
+                <a:cs typeface="Calibri" pitchFamily="34" charset="-120"/>
+              </a:rPr>
+              <a:t>Kaspi дүкен, салық, жалақы</a:t>
+            </a:r>
+            <a:endParaRPr lang="en-US" sz="1200" dirty="0"/>
+          </a:p>
+          <a:p>
+            <a:pPr marL="342900" indent="-342900">
+              <a:spcAft>
+                <a:spcPts val="500"/>
+              </a:spcAft>
+              <a:buSzPct val="100000"/>
+              <a:buChar char="•"/>
+            </a:pPr>
+            <a:r>
+              <a:rPr lang="en-US" sz="1200" dirty="0">
+                <a:solidFill>
+                  <a:srgbClr val="FFFFFF"/>
+                </a:solidFill>
+                <a:latin typeface="Calibri" pitchFamily="34" charset="0"/>
+                <a:ea typeface="Calibri" pitchFamily="34" charset="-122"/>
+                <a:cs typeface="Calibri" pitchFamily="34" charset="-120"/>
+              </a:rPr>
+              <a:t>Таңбалау, акциз, көтерме</a:t>
+            </a:r>
+            <a:endParaRPr lang="en-US" sz="1200" dirty="0"/>
+          </a:p>
+          <a:p>
+            <a:pPr marL="342900" indent="-342900">
+              <a:spcAft>
+                <a:spcPts val="500"/>
+              </a:spcAft>
+              <a:buSzPct val="100000"/>
+              <a:buChar char="•"/>
+            </a:pPr>
+            <a:r>
+              <a:rPr lang="en-US" sz="1200" dirty="0">
+                <a:solidFill>
+                  <a:srgbClr val="FFFFFF"/>
+                </a:solidFill>
+                <a:latin typeface="Calibri" pitchFamily="34" charset="0"/>
+                <a:ea typeface="Calibri" pitchFamily="34" charset="-122"/>
+                <a:cs typeface="Calibri" pitchFamily="34" charset="-120"/>
+              </a:rPr>
+              <a:t>Автоматтандыру және API</a:t>
+            </a:r>
+            <a:endParaRPr lang="en-US" sz="1200" dirty="0"/>
+          </a:p>
+        </p:txBody>
+      </p:sp>
+      <p:sp>
+        <p:nvSpPr>
+          <p:cNvPr id="15" name="Text 13"/>
+          <p:cNvSpPr txBox="1"/>
+          <p:nvPr/>
+        </p:nvSpPr>
+        <p:spPr>
+          <a:xfrm>
+            <a:off x="548640" y="4754880"/>
+            <a:ext cx="8229600" cy="274320"/>
+          </a:xfrm>
+          <a:prstGeom prst="rect">
+            <a:avLst/>
+          </a:prstGeom>
+          <a:noFill/>
+          <a:ln/>
+        </p:spPr>
+        <p:txBody>
+          <a:bodyPr wrap="square" lIns="0" tIns="0" rIns="0" bIns="0" rtlCol="0" anchor="ctr"/>
+          <a:lstStyle/>
+          <a:p>
+            <a:pPr algn="ctr" indent="0" marL="0">
+              <a:buNone/>
+            </a:pPr>
+            <a:r>
+              <a:rPr lang="en-US" sz="1200" dirty="0">
+                <a:solidFill>
+                  <a:srgbClr val="6B7770"/>
+                </a:solidFill>
+                <a:latin typeface="Calibri" pitchFamily="34" charset="0"/>
+                <a:ea typeface="Calibri" pitchFamily="34" charset="-122"/>
+                <a:cs typeface="Calibri" pitchFamily="34" charset="-120"/>
+              </a:rPr>
+              <a:t>Қосымша дүкен — 4 900 ₸ · Орнату 20 000 ₸ · Жылға төлесеңіз — 2 ай сыйлық</a:t>
+            </a:r>
+            <a:endParaRPr lang="en-US" sz="1200" dirty="0"/>
+          </a:p>
+        </p:txBody>
+      </p:sp>
+    </p:spTree>
+  </p:cSld>
+  <p:clrMapOvr>
+    <a:masterClrMapping/>
+  </p:clrMapOvr>
+</p:sld>
+</file>
+
+<file path=ppt/slides/slide11.xml><?xml version="1.0" encoding="utf-8"?>
+<p:sld xmlns:a="http://schemas.openxmlformats.org/drawingml/2006/main" xmlns:r="http://schemas.openxmlformats.org/officeDocument/2006/relationships" xmlns:p="http://schemas.openxmlformats.org/presentationml/2006/main">
+  <p:cSld name="Slide 11">
     <p:bg>
       <p:bgPr>
         <a:solidFill>
@@ -3181,7 +3914,7 @@
                 <a:ea typeface="Calibri" pitchFamily="34" charset="-122"/>
                 <a:cs typeface="Calibri" pitchFamily="34" charset="-120"/>
               </a:rPr>
-              <a:t>14 күн тегін сынақ</a:t>
+              <a:t>2 күн тегін сынақ</a:t>
             </a:r>
             <a:endParaRPr lang="en-US" sz="1800" dirty="0"/>
           </a:p>
@@ -3234,9 +3967,9 @@
 </p:sld>
 </file>
 
-<file path=ppt/slides/slide11.xml><?xml version="1.0" encoding="utf-8"?>
+<file path=ppt/slides/slide12.xml><?xml version="1.0" encoding="utf-8"?>
 <p:sld xmlns:a="http://schemas.openxmlformats.org/drawingml/2006/main" xmlns:r="http://schemas.openxmlformats.org/officeDocument/2006/relationships" xmlns:p="http://schemas.openxmlformats.org/presentationml/2006/main">
-  <p:cSld name="Slide 11">
+  <p:cSld name="Slide 12">
     <p:bg>
       <p:bgPr>
         <a:solidFill>
@@ -3448,6 +4181,532 @@
     <p:bg>
       <p:bgPr>
         <a:solidFill>
+          <a:srgbClr val="0F3D2E"/>
+        </a:solidFill>
+      </p:bgPr>
+    </p:bg>
+    <p:spTree>
+      <p:nvGrpSpPr>
+        <p:cNvPr id="1" name=""/>
+        <p:cNvGrpSpPr/>
+        <p:nvPr/>
+      </p:nvGrpSpPr>
+      <p:grpSpPr>
+        <a:xfrm>
+          <a:off x="0" y="0"/>
+          <a:ext cx="0" cy="0"/>
+          <a:chOff x="0" y="0"/>
+          <a:chExt cx="0" cy="0"/>
+        </a:xfrm>
+      </p:grpSpPr>
+      <p:sp>
+        <p:nvSpPr>
+          <p:cNvPr id="2" name="Text 0"/>
+          <p:cNvSpPr txBox="1"/>
+          <p:nvPr/>
+        </p:nvSpPr>
+        <p:spPr>
+          <a:xfrm>
+            <a:off x="457200" y="274320"/>
+            <a:ext cx="5029200" cy="502920"/>
+          </a:xfrm>
+          <a:prstGeom prst="rect">
+            <a:avLst/>
+          </a:prstGeom>
+          <a:noFill/>
+          <a:ln/>
+        </p:spPr>
+        <p:txBody>
+          <a:bodyPr wrap="square" lIns="0" tIns="0" rIns="0" bIns="0" rtlCol="0" anchor="ctr"/>
+          <a:lstStyle/>
+          <a:p>
+            <a:pPr indent="0" marL="0">
+              <a:buNone/>
+            </a:pPr>
+            <a:r>
+              <a:rPr lang="en-US" sz="3000" b="1" dirty="0">
+                <a:solidFill>
+                  <a:srgbClr val="FFFFFF"/>
+                </a:solidFill>
+                <a:latin typeface="Cambria" pitchFamily="34" charset="0"/>
+                <a:ea typeface="Cambria" pitchFamily="34" charset="-122"/>
+                <a:cs typeface="Cambria" pitchFamily="34" charset="-120"/>
+              </a:rPr>
+              <a:t>Кассирдің экраны</a:t>
+            </a:r>
+            <a:endParaRPr lang="en-US" sz="3000" dirty="0"/>
+          </a:p>
+        </p:txBody>
+      </p:sp>
+      <p:sp>
+        <p:nvSpPr>
+          <p:cNvPr id="3" name="Text 1"/>
+          <p:cNvSpPr txBox="1"/>
+          <p:nvPr/>
+        </p:nvSpPr>
+        <p:spPr>
+          <a:xfrm>
+            <a:off x="457200" y="777240"/>
+            <a:ext cx="5029200" cy="320040"/>
+          </a:xfrm>
+          <a:prstGeom prst="rect">
+            <a:avLst/>
+          </a:prstGeom>
+          <a:noFill/>
+          <a:ln/>
+        </p:spPr>
+        <p:txBody>
+          <a:bodyPr wrap="square" lIns="0" tIns="0" rIns="0" bIns="0" rtlCol="0" anchor="ctr"/>
+          <a:lstStyle/>
+          <a:p>
+            <a:pPr indent="0" marL="0">
+              <a:buNone/>
+            </a:pPr>
+            <a:r>
+              <a:rPr lang="en-US" sz="1400" i="1" dirty="0">
+                <a:solidFill>
+                  <a:srgbClr val="C9A227"/>
+                </a:solidFill>
+                <a:latin typeface="Calibri" pitchFamily="34" charset="0"/>
+                <a:ea typeface="Calibri" pitchFamily="34" charset="-122"/>
+                <a:cs typeface="Calibri" pitchFamily="34" charset="-120"/>
+              </a:rPr>
+              <a:t>Нақты касса. Сурет емес.</a:t>
+            </a:r>
+            <a:endParaRPr lang="en-US" sz="1400" dirty="0"/>
+          </a:p>
+        </p:txBody>
+      </p:sp>
+      <p:pic>
+        <p:nvPicPr>
+          <p:cNvPr id="4" name="Image 0" descr="/home/claude/pres/kassa.png">    </p:cNvPr>
+          <p:cNvPicPr>
+            <a:picLocks noChangeAspect="1"/>
+          </p:cNvPicPr>
+          <p:nvPr/>
+        </p:nvPicPr>
+        <p:blipFill>
+          <a:blip r:embed="rId1"/>
+          <a:stretch>
+            <a:fillRect/>
+          </a:stretch>
+        </p:blipFill>
+        <p:spPr>
+          <a:xfrm>
+            <a:off x="457200" y="1234440"/>
+            <a:ext cx="6035040" cy="3392424"/>
+          </a:xfrm>
+          <a:prstGeom prst="rect">
+            <a:avLst/>
+          </a:prstGeom>
+        </p:spPr>
+      </p:pic>
+      <p:sp>
+        <p:nvSpPr>
+          <p:cNvPr id="5" name="Shape 2"/>
+          <p:cNvSpPr/>
+          <p:nvPr/>
+        </p:nvSpPr>
+        <p:spPr>
+          <a:xfrm>
+            <a:off x="6766560" y="1335024"/>
+            <a:ext cx="292608" cy="292608"/>
+          </a:xfrm>
+          <a:prstGeom prst="ellipse">
+            <a:avLst/>
+          </a:prstGeom>
+          <a:solidFill>
+            <a:srgbClr val="C9A227"/>
+          </a:solidFill>
+          <a:ln/>
+        </p:spPr>
+      </p:sp>
+      <p:sp>
+        <p:nvSpPr>
+          <p:cNvPr id="6" name="Text 3"/>
+          <p:cNvSpPr txBox="1"/>
+          <p:nvPr/>
+        </p:nvSpPr>
+        <p:spPr>
+          <a:xfrm>
+            <a:off x="7178040" y="1280160"/>
+            <a:ext cx="1874520" cy="365760"/>
+          </a:xfrm>
+          <a:prstGeom prst="rect">
+            <a:avLst/>
+          </a:prstGeom>
+          <a:noFill/>
+          <a:ln/>
+        </p:spPr>
+        <p:txBody>
+          <a:bodyPr wrap="square" lIns="0" tIns="0" rIns="0" bIns="0" rtlCol="0" anchor="ctr"/>
+          <a:lstStyle/>
+          <a:p>
+            <a:pPr indent="0" marL="0">
+              <a:buNone/>
+            </a:pPr>
+            <a:r>
+              <a:rPr lang="en-US" sz="1500" b="1" dirty="0">
+                <a:solidFill>
+                  <a:srgbClr val="FFFFFF"/>
+                </a:solidFill>
+                <a:latin typeface="Calibri" pitchFamily="34" charset="0"/>
+                <a:ea typeface="Calibri" pitchFamily="34" charset="-122"/>
+                <a:cs typeface="Calibri" pitchFamily="34" charset="-120"/>
+              </a:rPr>
+              <a:t>Бір экран</a:t>
+            </a:r>
+            <a:endParaRPr lang="en-US" sz="1500" dirty="0"/>
+          </a:p>
+        </p:txBody>
+      </p:sp>
+      <p:sp>
+        <p:nvSpPr>
+          <p:cNvPr id="7" name="Text 4"/>
+          <p:cNvSpPr txBox="1"/>
+          <p:nvPr/>
+        </p:nvSpPr>
+        <p:spPr>
+          <a:xfrm>
+            <a:off x="7178040" y="1609344"/>
+            <a:ext cx="1874520" cy="457200"/>
+          </a:xfrm>
+          <a:prstGeom prst="rect">
+            <a:avLst/>
+          </a:prstGeom>
+          <a:noFill/>
+          <a:ln/>
+        </p:spPr>
+        <p:txBody>
+          <a:bodyPr wrap="square" lIns="0" tIns="0" rIns="0" bIns="0" rtlCol="0" anchor="ctr"/>
+          <a:lstStyle/>
+          <a:p>
+            <a:pPr indent="0" marL="0">
+              <a:buNone/>
+            </a:pPr>
+            <a:r>
+              <a:rPr lang="en-US" sz="1100" dirty="0">
+                <a:solidFill>
+                  <a:srgbClr val="B8C9BF"/>
+                </a:solidFill>
+                <a:latin typeface="Calibri" pitchFamily="34" charset="0"/>
+                <a:ea typeface="Calibri" pitchFamily="34" charset="-122"/>
+                <a:cs typeface="Calibri" pitchFamily="34" charset="-120"/>
+              </a:rPr>
+              <a:t>Тауар да, чек те көрінеді</a:t>
+            </a:r>
+            <a:endParaRPr lang="en-US" sz="1100" dirty="0"/>
+          </a:p>
+        </p:txBody>
+      </p:sp>
+      <p:sp>
+        <p:nvSpPr>
+          <p:cNvPr id="8" name="Shape 5"/>
+          <p:cNvSpPr/>
+          <p:nvPr/>
+        </p:nvSpPr>
+        <p:spPr>
+          <a:xfrm>
+            <a:off x="6766560" y="2176272"/>
+            <a:ext cx="292608" cy="292608"/>
+          </a:xfrm>
+          <a:prstGeom prst="ellipse">
+            <a:avLst/>
+          </a:prstGeom>
+          <a:solidFill>
+            <a:srgbClr val="C9A227"/>
+          </a:solidFill>
+          <a:ln/>
+        </p:spPr>
+      </p:sp>
+      <p:sp>
+        <p:nvSpPr>
+          <p:cNvPr id="9" name="Text 6"/>
+          <p:cNvSpPr txBox="1"/>
+          <p:nvPr/>
+        </p:nvSpPr>
+        <p:spPr>
+          <a:xfrm>
+            <a:off x="7178040" y="2121408"/>
+            <a:ext cx="1874520" cy="365760"/>
+          </a:xfrm>
+          <a:prstGeom prst="rect">
+            <a:avLst/>
+          </a:prstGeom>
+          <a:noFill/>
+          <a:ln/>
+        </p:spPr>
+        <p:txBody>
+          <a:bodyPr wrap="square" lIns="0" tIns="0" rIns="0" bIns="0" rtlCol="0" anchor="ctr"/>
+          <a:lstStyle/>
+          <a:p>
+            <a:pPr indent="0" marL="0">
+              <a:buNone/>
+            </a:pPr>
+            <a:r>
+              <a:rPr lang="en-US" sz="1500" b="1" dirty="0">
+                <a:solidFill>
+                  <a:srgbClr val="FFFFFF"/>
+                </a:solidFill>
+                <a:latin typeface="Calibri" pitchFamily="34" charset="0"/>
+                <a:ea typeface="Calibri" pitchFamily="34" charset="-122"/>
+                <a:cs typeface="Calibri" pitchFamily="34" charset="-120"/>
+              </a:rPr>
+              <a:t>Ірі әріп</a:t>
+            </a:r>
+            <a:endParaRPr lang="en-US" sz="1500" dirty="0"/>
+          </a:p>
+        </p:txBody>
+      </p:sp>
+      <p:sp>
+        <p:nvSpPr>
+          <p:cNvPr id="10" name="Text 7"/>
+          <p:cNvSpPr txBox="1"/>
+          <p:nvPr/>
+        </p:nvSpPr>
+        <p:spPr>
+          <a:xfrm>
+            <a:off x="7178040" y="2450592"/>
+            <a:ext cx="1874520" cy="457200"/>
+          </a:xfrm>
+          <a:prstGeom prst="rect">
+            <a:avLst/>
+          </a:prstGeom>
+          <a:noFill/>
+          <a:ln/>
+        </p:spPr>
+        <p:txBody>
+          <a:bodyPr wrap="square" lIns="0" tIns="0" rIns="0" bIns="0" rtlCol="0" anchor="ctr"/>
+          <a:lstStyle/>
+          <a:p>
+            <a:pPr indent="0" marL="0">
+              <a:buNone/>
+            </a:pPr>
+            <a:r>
+              <a:rPr lang="en-US" sz="1100" dirty="0">
+                <a:solidFill>
+                  <a:srgbClr val="B8C9BF"/>
+                </a:solidFill>
+                <a:latin typeface="Calibri" pitchFamily="34" charset="0"/>
+                <a:ea typeface="Calibri" pitchFamily="34" charset="-122"/>
+                <a:cs typeface="Calibri" pitchFamily="34" charset="-120"/>
+              </a:rPr>
+              <a:t>Көзі нашар кассир де оқиды</a:t>
+            </a:r>
+            <a:endParaRPr lang="en-US" sz="1100" dirty="0"/>
+          </a:p>
+        </p:txBody>
+      </p:sp>
+      <p:sp>
+        <p:nvSpPr>
+          <p:cNvPr id="11" name="Shape 8"/>
+          <p:cNvSpPr/>
+          <p:nvPr/>
+        </p:nvSpPr>
+        <p:spPr>
+          <a:xfrm>
+            <a:off x="6766560" y="3017520"/>
+            <a:ext cx="292608" cy="292608"/>
+          </a:xfrm>
+          <a:prstGeom prst="ellipse">
+            <a:avLst/>
+          </a:prstGeom>
+          <a:solidFill>
+            <a:srgbClr val="C9A227"/>
+          </a:solidFill>
+          <a:ln/>
+        </p:spPr>
+      </p:sp>
+      <p:sp>
+        <p:nvSpPr>
+          <p:cNvPr id="12" name="Text 9"/>
+          <p:cNvSpPr txBox="1"/>
+          <p:nvPr/>
+        </p:nvSpPr>
+        <p:spPr>
+          <a:xfrm>
+            <a:off x="7178040" y="2962656"/>
+            <a:ext cx="1874520" cy="365760"/>
+          </a:xfrm>
+          <a:prstGeom prst="rect">
+            <a:avLst/>
+          </a:prstGeom>
+          <a:noFill/>
+          <a:ln/>
+        </p:spPr>
+        <p:txBody>
+          <a:bodyPr wrap="square" lIns="0" tIns="0" rIns="0" bIns="0" rtlCol="0" anchor="ctr"/>
+          <a:lstStyle/>
+          <a:p>
+            <a:pPr indent="0" marL="0">
+              <a:buNone/>
+            </a:pPr>
+            <a:r>
+              <a:rPr lang="en-US" sz="1500" b="1" dirty="0">
+                <a:solidFill>
+                  <a:srgbClr val="FFFFFF"/>
+                </a:solidFill>
+                <a:latin typeface="Calibri" pitchFamily="34" charset="0"/>
+                <a:ea typeface="Calibri" pitchFamily="34" charset="-122"/>
+                <a:cs typeface="Calibri" pitchFamily="34" charset="-120"/>
+              </a:rPr>
+              <a:t>Салмақ өзі</a:t>
+            </a:r>
+            <a:endParaRPr lang="en-US" sz="1500" dirty="0"/>
+          </a:p>
+        </p:txBody>
+      </p:sp>
+      <p:sp>
+        <p:nvSpPr>
+          <p:cNvPr id="13" name="Text 10"/>
+          <p:cNvSpPr txBox="1"/>
+          <p:nvPr/>
+        </p:nvSpPr>
+        <p:spPr>
+          <a:xfrm>
+            <a:off x="7178040" y="3291840"/>
+            <a:ext cx="1874520" cy="457200"/>
+          </a:xfrm>
+          <a:prstGeom prst="rect">
+            <a:avLst/>
+          </a:prstGeom>
+          <a:noFill/>
+          <a:ln/>
+        </p:spPr>
+        <p:txBody>
+          <a:bodyPr wrap="square" lIns="0" tIns="0" rIns="0" bIns="0" rtlCol="0" anchor="ctr"/>
+          <a:lstStyle/>
+          <a:p>
+            <a:pPr indent="0" marL="0">
+              <a:buNone/>
+            </a:pPr>
+            <a:r>
+              <a:rPr lang="en-US" sz="1100" dirty="0">
+                <a:solidFill>
+                  <a:srgbClr val="B8C9BF"/>
+                </a:solidFill>
+                <a:latin typeface="Calibri" pitchFamily="34" charset="0"/>
+                <a:ea typeface="Calibri" pitchFamily="34" charset="-122"/>
+                <a:cs typeface="Calibri" pitchFamily="34" charset="-120"/>
+              </a:rPr>
+              <a:t>Картоп 4,5 кг — қолмен енгізілмеген</a:t>
+            </a:r>
+            <a:endParaRPr lang="en-US" sz="1100" dirty="0"/>
+          </a:p>
+        </p:txBody>
+      </p:sp>
+      <p:sp>
+        <p:nvSpPr>
+          <p:cNvPr id="14" name="Shape 11"/>
+          <p:cNvSpPr/>
+          <p:nvPr/>
+        </p:nvSpPr>
+        <p:spPr>
+          <a:xfrm>
+            <a:off x="6766560" y="3858768"/>
+            <a:ext cx="292608" cy="292608"/>
+          </a:xfrm>
+          <a:prstGeom prst="ellipse">
+            <a:avLst/>
+          </a:prstGeom>
+          <a:solidFill>
+            <a:srgbClr val="C9A227"/>
+          </a:solidFill>
+          <a:ln/>
+        </p:spPr>
+      </p:sp>
+      <p:sp>
+        <p:nvSpPr>
+          <p:cNvPr id="15" name="Text 12"/>
+          <p:cNvSpPr txBox="1"/>
+          <p:nvPr/>
+        </p:nvSpPr>
+        <p:spPr>
+          <a:xfrm>
+            <a:off x="7178040" y="3803904"/>
+            <a:ext cx="1874520" cy="365760"/>
+          </a:xfrm>
+          <a:prstGeom prst="rect">
+            <a:avLst/>
+          </a:prstGeom>
+          <a:noFill/>
+          <a:ln/>
+        </p:spPr>
+        <p:txBody>
+          <a:bodyPr wrap="square" lIns="0" tIns="0" rIns="0" bIns="0" rtlCol="0" anchor="ctr"/>
+          <a:lstStyle/>
+          <a:p>
+            <a:pPr indent="0" marL="0">
+              <a:buNone/>
+            </a:pPr>
+            <a:r>
+              <a:rPr lang="en-US" sz="1500" b="1" dirty="0">
+                <a:solidFill>
+                  <a:srgbClr val="FFFFFF"/>
+                </a:solidFill>
+                <a:latin typeface="Calibri" pitchFamily="34" charset="0"/>
+                <a:ea typeface="Calibri" pitchFamily="34" charset="-122"/>
+                <a:cs typeface="Calibri" pitchFamily="34" charset="-120"/>
+              </a:rPr>
+              <a:t>ОПЛАТА-да сома</a:t>
+            </a:r>
+            <a:endParaRPr lang="en-US" sz="1500" dirty="0"/>
+          </a:p>
+        </p:txBody>
+      </p:sp>
+      <p:sp>
+        <p:nvSpPr>
+          <p:cNvPr id="16" name="Text 13"/>
+          <p:cNvSpPr txBox="1"/>
+          <p:nvPr/>
+        </p:nvSpPr>
+        <p:spPr>
+          <a:xfrm>
+            <a:off x="7178040" y="4133088"/>
+            <a:ext cx="1874520" cy="457200"/>
+          </a:xfrm>
+          <a:prstGeom prst="rect">
+            <a:avLst/>
+          </a:prstGeom>
+          <a:noFill/>
+          <a:ln/>
+        </p:spPr>
+        <p:txBody>
+          <a:bodyPr wrap="square" lIns="0" tIns="0" rIns="0" bIns="0" rtlCol="0" anchor="ctr"/>
+          <a:lstStyle/>
+          <a:p>
+            <a:pPr indent="0" marL="0">
+              <a:buNone/>
+            </a:pPr>
+            <a:r>
+              <a:rPr lang="en-US" sz="1100" dirty="0">
+                <a:solidFill>
+                  <a:srgbClr val="B8C9BF"/>
+                </a:solidFill>
+                <a:latin typeface="Calibri" pitchFamily="34" charset="0"/>
+                <a:ea typeface="Calibri" pitchFamily="34" charset="-122"/>
+                <a:cs typeface="Calibri" pitchFamily="34" charset="-120"/>
+              </a:rPr>
+              <a:t>Кассир қанша алатынын көріп тұрады</a:t>
+            </a:r>
+            <a:endParaRPr lang="en-US" sz="1100" dirty="0"/>
+          </a:p>
+        </p:txBody>
+      </p:sp>
+    </p:spTree>
+  </p:cSld>
+  <p:clrMapOvr>
+    <a:masterClrMapping/>
+  </p:clrMapOvr>
+</p:sld>
+</file>
+
+<file path=ppt/slides/slide3.xml><?xml version="1.0" encoding="utf-8"?>
+<p:sld xmlns:a="http://schemas.openxmlformats.org/drawingml/2006/main" xmlns:r="http://schemas.openxmlformats.org/officeDocument/2006/relationships" xmlns:p="http://schemas.openxmlformats.org/presentationml/2006/main">
+  <p:cSld name="Slide 3">
+    <p:bg>
+      <p:bgPr>
+        <a:solidFill>
           <a:srgbClr val="FFFFFF"/>
         </a:solidFill>
       </p:bgPr>
@@ -4061,9 +5320,9 @@
 </p:sld>
 </file>
 
-<file path=ppt/slides/slide3.xml><?xml version="1.0" encoding="utf-8"?>
+<file path=ppt/slides/slide4.xml><?xml version="1.0" encoding="utf-8"?>
 <p:sld xmlns:a="http://schemas.openxmlformats.org/drawingml/2006/main" xmlns:r="http://schemas.openxmlformats.org/officeDocument/2006/relationships" xmlns:p="http://schemas.openxmlformats.org/presentationml/2006/main">
-  <p:cSld name="Slide 3">
+  <p:cSld name="Slide 4">
     <p:bg>
       <p:bgPr>
         <a:solidFill>
@@ -4972,9 +6231,9 @@
 </p:sld>
 </file>
 
-<file path=ppt/slides/slide4.xml><?xml version="1.0" encoding="utf-8"?>
+<file path=ppt/slides/slide5.xml><?xml version="1.0" encoding="utf-8"?>
 <p:sld xmlns:a="http://schemas.openxmlformats.org/drawingml/2006/main" xmlns:r="http://schemas.openxmlformats.org/officeDocument/2006/relationships" xmlns:p="http://schemas.openxmlformats.org/presentationml/2006/main">
-  <p:cSld name="Slide 4">
+  <p:cSld name="Slide 5">
     <p:bg>
       <p:bgPr>
         <a:solidFill>
@@ -5462,9 +6721,9 @@
 </p:sld>
 </file>
 
-<file path=ppt/slides/slide5.xml><?xml version="1.0" encoding="utf-8"?>
+<file path=ppt/slides/slide6.xml><?xml version="1.0" encoding="utf-8"?>
 <p:sld xmlns:a="http://schemas.openxmlformats.org/drawingml/2006/main" xmlns:r="http://schemas.openxmlformats.org/officeDocument/2006/relationships" xmlns:p="http://schemas.openxmlformats.org/presentationml/2006/main">
-  <p:cSld name="Slide 5">
+  <p:cSld name="Slide 6">
     <p:bg>
       <p:bgPr>
         <a:solidFill>
@@ -6811,9 +8070,9 @@
 </p:sld>
 </file>
 
-<file path=ppt/slides/slide6.xml><?xml version="1.0" encoding="utf-8"?>
+<file path=ppt/slides/slide7.xml><?xml version="1.0" encoding="utf-8"?>
 <p:sld xmlns:a="http://schemas.openxmlformats.org/drawingml/2006/main" xmlns:r="http://schemas.openxmlformats.org/officeDocument/2006/relationships" xmlns:p="http://schemas.openxmlformats.org/presentationml/2006/main">
-  <p:cSld name="Slide 6">
+  <p:cSld name="Slide 7">
     <p:bg>
       <p:bgPr>
         <a:solidFill>
@@ -7855,762 +9114,6 @@
               <a:t>Орнатады, оқытады, келеді. Байланыс орталығына емес — адамға</a:t>
             </a:r>
             <a:endParaRPr lang="en-US" sz="1100" dirty="0"/>
-          </a:p>
-        </p:txBody>
-      </p:sp>
-    </p:spTree>
-  </p:cSld>
-  <p:clrMapOvr>
-    <a:masterClrMapping/>
-  </p:clrMapOvr>
-</p:sld>
-</file>
-
-<file path=ppt/slides/slide7.xml><?xml version="1.0" encoding="utf-8"?>
-<p:sld xmlns:a="http://schemas.openxmlformats.org/drawingml/2006/main" xmlns:r="http://schemas.openxmlformats.org/officeDocument/2006/relationships" xmlns:p="http://schemas.openxmlformats.org/presentationml/2006/main">
-  <p:cSld name="Slide 7">
-    <p:bg>
-      <p:bgPr>
-        <a:solidFill>
-          <a:srgbClr val="FFFFFF"/>
-        </a:solidFill>
-      </p:bgPr>
-    </p:bg>
-    <p:spTree>
-      <p:nvGrpSpPr>
-        <p:cNvPr id="1" name=""/>
-        <p:cNvGrpSpPr/>
-        <p:nvPr/>
-      </p:nvGrpSpPr>
-      <p:grpSpPr>
-        <a:xfrm>
-          <a:off x="0" y="0"/>
-          <a:ext cx="0" cy="0"/>
-          <a:chOff x="0" y="0"/>
-          <a:chExt cx="0" cy="0"/>
-        </a:xfrm>
-      </p:grpSpPr>
-      <p:sp>
-        <p:nvSpPr>
-          <p:cNvPr id="2" name="Text 0"/>
-          <p:cNvSpPr txBox="1"/>
-          <p:nvPr/>
-        </p:nvSpPr>
-        <p:spPr>
-          <a:xfrm>
-            <a:off x="548640" y="365760"/>
-            <a:ext cx="8229600" cy="640080"/>
-          </a:xfrm>
-          <a:prstGeom prst="rect">
-            <a:avLst/>
-          </a:prstGeom>
-          <a:noFill/>
-          <a:ln/>
-        </p:spPr>
-        <p:txBody>
-          <a:bodyPr wrap="square" lIns="0" tIns="0" rIns="0" bIns="0" rtlCol="0" anchor="ctr"/>
-          <a:lstStyle/>
-          <a:p>
-            <a:pPr indent="0" marL="0">
-              <a:buNone/>
-            </a:pPr>
-            <a:r>
-              <a:rPr lang="en-US" sz="3000" b="1" dirty="0">
-                <a:solidFill>
-                  <a:srgbClr val="0F3D2E"/>
-                </a:solidFill>
-                <a:latin typeface="Cambria" pitchFamily="34" charset="0"/>
-                <a:ea typeface="Cambria" pitchFamily="34" charset="-122"/>
-                <a:cs typeface="Cambria" pitchFamily="34" charset="-120"/>
-              </a:rPr>
-              <a:t>Телефоннан — дүкен алақанда</a:t>
-            </a:r>
-            <a:endParaRPr lang="en-US" sz="3000" dirty="0"/>
-          </a:p>
-        </p:txBody>
-      </p:sp>
-      <p:sp>
-        <p:nvSpPr>
-          <p:cNvPr id="3" name="Shape 1"/>
-          <p:cNvSpPr/>
-          <p:nvPr/>
-        </p:nvSpPr>
-        <p:spPr>
-          <a:xfrm>
-            <a:off x="5760720" y="1097280"/>
-            <a:ext cx="2377440" cy="3566160"/>
-          </a:xfrm>
-          <a:prstGeom prst="roundRect">
-            <a:avLst>
-              <a:gd name="adj" fmla="val 11538"/>
-            </a:avLst>
-          </a:prstGeom>
-          <a:solidFill>
-            <a:srgbClr val="0F3D2E"/>
-          </a:solidFill>
-          <a:ln/>
-        </p:spPr>
-      </p:sp>
-      <p:sp>
-        <p:nvSpPr>
-          <p:cNvPr id="4" name="Shape 2"/>
-          <p:cNvSpPr/>
-          <p:nvPr/>
-        </p:nvSpPr>
-        <p:spPr>
-          <a:xfrm>
-            <a:off x="5897880" y="1371600"/>
-            <a:ext cx="2103120" cy="3108960"/>
-          </a:xfrm>
-          <a:prstGeom prst="roundRect">
-            <a:avLst>
-              <a:gd name="adj" fmla="val 6522"/>
-            </a:avLst>
-          </a:prstGeom>
-          <a:solidFill>
-            <a:srgbClr val="F4F6F3"/>
-          </a:solidFill>
-          <a:ln/>
-        </p:spPr>
-      </p:sp>
-      <p:sp>
-        <p:nvSpPr>
-          <p:cNvPr id="5" name="Text 3"/>
-          <p:cNvSpPr txBox="1"/>
-          <p:nvPr/>
-        </p:nvSpPr>
-        <p:spPr>
-          <a:xfrm>
-            <a:off x="6035040" y="1463040"/>
-            <a:ext cx="1828800" cy="274320"/>
-          </a:xfrm>
-          <a:prstGeom prst="rect">
-            <a:avLst/>
-          </a:prstGeom>
-          <a:noFill/>
-          <a:ln/>
-        </p:spPr>
-        <p:txBody>
-          <a:bodyPr wrap="square" lIns="0" tIns="0" rIns="0" bIns="0" rtlCol="0" anchor="ctr"/>
-          <a:lstStyle/>
-          <a:p>
-            <a:pPr indent="0" marL="0">
-              <a:buNone/>
-            </a:pPr>
-            <a:r>
-              <a:rPr lang="en-US" sz="1100" dirty="0">
-                <a:solidFill>
-                  <a:srgbClr val="6B7770"/>
-                </a:solidFill>
-                <a:latin typeface="Calibri" pitchFamily="34" charset="0"/>
-                <a:ea typeface="Calibri" pitchFamily="34" charset="-122"/>
-                <a:cs typeface="Calibri" pitchFamily="34" charset="-120"/>
-              </a:rPr>
-              <a:t>Бүгін</a:t>
-            </a:r>
-            <a:endParaRPr lang="en-US" sz="1100" dirty="0"/>
-          </a:p>
-        </p:txBody>
-      </p:sp>
-      <p:sp>
-        <p:nvSpPr>
-          <p:cNvPr id="6" name="Text 4"/>
-          <p:cNvSpPr txBox="1"/>
-          <p:nvPr/>
-        </p:nvSpPr>
-        <p:spPr>
-          <a:xfrm>
-            <a:off x="6035040" y="1737360"/>
-            <a:ext cx="1828800" cy="228600"/>
-          </a:xfrm>
-          <a:prstGeom prst="rect">
-            <a:avLst/>
-          </a:prstGeom>
-          <a:noFill/>
-          <a:ln/>
-        </p:spPr>
-        <p:txBody>
-          <a:bodyPr wrap="square" lIns="0" tIns="0" rIns="0" bIns="0" rtlCol="0" anchor="ctr"/>
-          <a:lstStyle/>
-          <a:p>
-            <a:pPr indent="0" marL="0">
-              <a:buNone/>
-            </a:pPr>
-            <a:r>
-              <a:rPr lang="en-US" sz="900" dirty="0">
-                <a:solidFill>
-                  <a:srgbClr val="6B7770"/>
-                </a:solidFill>
-                <a:latin typeface="Calibri" pitchFamily="34" charset="0"/>
-                <a:ea typeface="Calibri" pitchFamily="34" charset="-122"/>
-                <a:cs typeface="Calibri" pitchFamily="34" charset="-120"/>
-              </a:rPr>
-              <a:t>Түсім</a:t>
-            </a:r>
-            <a:endParaRPr lang="en-US" sz="900" dirty="0"/>
-          </a:p>
-        </p:txBody>
-      </p:sp>
-      <p:sp>
-        <p:nvSpPr>
-          <p:cNvPr id="7" name="Text 5"/>
-          <p:cNvSpPr txBox="1"/>
-          <p:nvPr/>
-        </p:nvSpPr>
-        <p:spPr>
-          <a:xfrm>
-            <a:off x="6035040" y="1938528"/>
-            <a:ext cx="1828800" cy="365760"/>
-          </a:xfrm>
-          <a:prstGeom prst="rect">
-            <a:avLst/>
-          </a:prstGeom>
-          <a:noFill/>
-          <a:ln/>
-        </p:spPr>
-        <p:txBody>
-          <a:bodyPr wrap="square" lIns="0" tIns="0" rIns="0" bIns="0" rtlCol="0" anchor="ctr"/>
-          <a:lstStyle/>
-          <a:p>
-            <a:pPr indent="0" marL="0">
-              <a:buNone/>
-            </a:pPr>
-            <a:r>
-              <a:rPr lang="en-US" sz="2200" b="1" dirty="0">
-                <a:solidFill>
-                  <a:srgbClr val="0F3D2E"/>
-                </a:solidFill>
-                <a:latin typeface="Cambria" pitchFamily="34" charset="0"/>
-                <a:ea typeface="Cambria" pitchFamily="34" charset="-122"/>
-                <a:cs typeface="Cambria" pitchFamily="34" charset="-120"/>
-              </a:rPr>
-              <a:t>184 500 ₸</a:t>
-            </a:r>
-            <a:endParaRPr lang="en-US" sz="2200" dirty="0"/>
-          </a:p>
-        </p:txBody>
-      </p:sp>
-      <p:sp>
-        <p:nvSpPr>
-          <p:cNvPr id="8" name="Text 6"/>
-          <p:cNvSpPr txBox="1"/>
-          <p:nvPr/>
-        </p:nvSpPr>
-        <p:spPr>
-          <a:xfrm>
-            <a:off x="6035040" y="2377440"/>
-            <a:ext cx="1828800" cy="228600"/>
-          </a:xfrm>
-          <a:prstGeom prst="rect">
-            <a:avLst/>
-          </a:prstGeom>
-          <a:noFill/>
-          <a:ln/>
-        </p:spPr>
-        <p:txBody>
-          <a:bodyPr wrap="square" lIns="0" tIns="0" rIns="0" bIns="0" rtlCol="0" anchor="ctr"/>
-          <a:lstStyle/>
-          <a:p>
-            <a:pPr indent="0" marL="0">
-              <a:buNone/>
-            </a:pPr>
-            <a:r>
-              <a:rPr lang="en-US" sz="1000" dirty="0">
-                <a:solidFill>
-                  <a:srgbClr val="1A1A1A"/>
-                </a:solidFill>
-                <a:latin typeface="Calibri" pitchFamily="34" charset="0"/>
-                <a:ea typeface="Calibri" pitchFamily="34" charset="-122"/>
-                <a:cs typeface="Calibri" pitchFamily="34" charset="-120"/>
-              </a:rPr>
-              <a:t>Чектер · 47</a:t>
-            </a:r>
-            <a:endParaRPr lang="en-US" sz="1000" dirty="0"/>
-          </a:p>
-        </p:txBody>
-      </p:sp>
-      <p:sp>
-        <p:nvSpPr>
-          <p:cNvPr id="9" name="Text 7"/>
-          <p:cNvSpPr txBox="1"/>
-          <p:nvPr/>
-        </p:nvSpPr>
-        <p:spPr>
-          <a:xfrm>
-            <a:off x="6035040" y="2606040"/>
-            <a:ext cx="1828800" cy="228600"/>
-          </a:xfrm>
-          <a:prstGeom prst="rect">
-            <a:avLst/>
-          </a:prstGeom>
-          <a:noFill/>
-          <a:ln/>
-        </p:spPr>
-        <p:txBody>
-          <a:bodyPr wrap="square" lIns="0" tIns="0" rIns="0" bIns="0" rtlCol="0" anchor="ctr"/>
-          <a:lstStyle/>
-          <a:p>
-            <a:pPr indent="0" marL="0">
-              <a:buNone/>
-            </a:pPr>
-            <a:r>
-              <a:rPr lang="en-US" sz="1000" dirty="0">
-                <a:solidFill>
-                  <a:srgbClr val="1A1A1A"/>
-                </a:solidFill>
-                <a:latin typeface="Calibri" pitchFamily="34" charset="0"/>
-                <a:ea typeface="Calibri" pitchFamily="34" charset="-122"/>
-                <a:cs typeface="Calibri" pitchFamily="34" charset="-120"/>
-              </a:rPr>
-              <a:t>Орташа чек · 3 925 ₸</a:t>
-            </a:r>
-            <a:endParaRPr lang="en-US" sz="1000" dirty="0"/>
-          </a:p>
-        </p:txBody>
-      </p:sp>
-      <p:sp>
-        <p:nvSpPr>
-          <p:cNvPr id="10" name="Text 8"/>
-          <p:cNvSpPr txBox="1"/>
-          <p:nvPr/>
-        </p:nvSpPr>
-        <p:spPr>
-          <a:xfrm>
-            <a:off x="6035040" y="2834640"/>
-            <a:ext cx="1828800" cy="228600"/>
-          </a:xfrm>
-          <a:prstGeom prst="rect">
-            <a:avLst/>
-          </a:prstGeom>
-          <a:noFill/>
-          <a:ln/>
-        </p:spPr>
-        <p:txBody>
-          <a:bodyPr wrap="square" lIns="0" tIns="0" rIns="0" bIns="0" rtlCol="0" anchor="ctr"/>
-          <a:lstStyle/>
-          <a:p>
-            <a:pPr indent="0" marL="0">
-              <a:buNone/>
-            </a:pPr>
-            <a:r>
-              <a:rPr lang="en-US" sz="1000" b="1" dirty="0">
-                <a:solidFill>
-                  <a:srgbClr val="1B6B4A"/>
-                </a:solidFill>
-                <a:latin typeface="Calibri" pitchFamily="34" charset="0"/>
-                <a:ea typeface="Calibri" pitchFamily="34" charset="-122"/>
-                <a:cs typeface="Calibri" pitchFamily="34" charset="-120"/>
-              </a:rPr>
-              <a:t>Пайда · 41 200 ₸</a:t>
-            </a:r>
-            <a:endParaRPr lang="en-US" sz="1000" dirty="0"/>
-          </a:p>
-        </p:txBody>
-      </p:sp>
-      <p:sp>
-        <p:nvSpPr>
-          <p:cNvPr id="11" name="Text 9"/>
-          <p:cNvSpPr txBox="1"/>
-          <p:nvPr/>
-        </p:nvSpPr>
-        <p:spPr>
-          <a:xfrm>
-            <a:off x="6035040" y="3200400"/>
-            <a:ext cx="1828800" cy="228600"/>
-          </a:xfrm>
-          <a:prstGeom prst="rect">
-            <a:avLst/>
-          </a:prstGeom>
-          <a:noFill/>
-          <a:ln/>
-        </p:spPr>
-        <p:txBody>
-          <a:bodyPr wrap="square" lIns="0" tIns="0" rIns="0" bIns="0" rtlCol="0" anchor="ctr"/>
-          <a:lstStyle/>
-          <a:p>
-            <a:pPr indent="0" marL="0">
-              <a:buNone/>
-            </a:pPr>
-            <a:r>
-              <a:rPr lang="en-US" sz="900" dirty="0">
-                <a:solidFill>
-                  <a:srgbClr val="6B7770"/>
-                </a:solidFill>
-                <a:latin typeface="Calibri" pitchFamily="34" charset="0"/>
-                <a:ea typeface="Calibri" pitchFamily="34" charset="-122"/>
-                <a:cs typeface="Calibri" pitchFamily="34" charset="-120"/>
-              </a:rPr>
-              <a:t>Шоттардағы ақша</a:t>
-            </a:r>
-            <a:endParaRPr lang="en-US" sz="900" dirty="0"/>
-          </a:p>
-        </p:txBody>
-      </p:sp>
-      <p:sp>
-        <p:nvSpPr>
-          <p:cNvPr id="12" name="Text 10"/>
-          <p:cNvSpPr txBox="1"/>
-          <p:nvPr/>
-        </p:nvSpPr>
-        <p:spPr>
-          <a:xfrm>
-            <a:off x="6035040" y="3401568"/>
-            <a:ext cx="1828800" cy="548640"/>
-          </a:xfrm>
-          <a:prstGeom prst="rect">
-            <a:avLst/>
-          </a:prstGeom>
-          <a:noFill/>
-          <a:ln/>
-        </p:spPr>
-        <p:txBody>
-          <a:bodyPr wrap="square" lIns="0" tIns="0" rIns="0" bIns="0" rtlCol="0" anchor="ctr"/>
-          <a:lstStyle/>
-          <a:p>
-            <a:pPr indent="0" marL="0">
-              <a:buNone/>
-            </a:pPr>
-            <a:r>
-              <a:rPr lang="en-US" sz="1000" dirty="0">
-                <a:solidFill>
-                  <a:srgbClr val="1A1A1A"/>
-                </a:solidFill>
-                <a:latin typeface="Calibri" pitchFamily="34" charset="0"/>
-                <a:ea typeface="Calibri" pitchFamily="34" charset="-122"/>
-                <a:cs typeface="Calibri" pitchFamily="34" charset="-120"/>
-              </a:rPr>
-              <a:t>Касса · 62 300 ₸</a:t>
-            </a:r>
-            <a:endParaRPr lang="en-US" sz="1000" dirty="0"/>
-          </a:p>
-          <a:p>
-            <a:pPr indent="0" marL="0">
-              <a:buNone/>
-            </a:pPr>
-            <a:r>
-              <a:rPr lang="en-US" sz="1000" dirty="0">
-                <a:solidFill>
-                  <a:srgbClr val="1A1A1A"/>
-                </a:solidFill>
-                <a:latin typeface="Calibri" pitchFamily="34" charset="0"/>
-                <a:ea typeface="Calibri" pitchFamily="34" charset="-122"/>
-                <a:cs typeface="Calibri" pitchFamily="34" charset="-120"/>
-              </a:rPr>
-              <a:t>Kaspi · 122 200 ₸</a:t>
-            </a:r>
-            <a:endParaRPr lang="en-US" sz="1000" dirty="0"/>
-          </a:p>
-        </p:txBody>
-      </p:sp>
-      <p:sp>
-        <p:nvSpPr>
-          <p:cNvPr id="13" name="Text 11"/>
-          <p:cNvSpPr txBox="1"/>
-          <p:nvPr/>
-        </p:nvSpPr>
-        <p:spPr>
-          <a:xfrm>
-            <a:off x="548640" y="1188720"/>
-            <a:ext cx="4846320" cy="320040"/>
-          </a:xfrm>
-          <a:prstGeom prst="rect">
-            <a:avLst/>
-          </a:prstGeom>
-          <a:noFill/>
-          <a:ln/>
-        </p:spPr>
-        <p:txBody>
-          <a:bodyPr wrap="square" lIns="0" tIns="0" rIns="0" bIns="0" rtlCol="0" anchor="ctr"/>
-          <a:lstStyle/>
-          <a:p>
-            <a:pPr indent="0" marL="0">
-              <a:buNone/>
-            </a:pPr>
-            <a:r>
-              <a:rPr lang="en-US" sz="1700" b="1" dirty="0">
-                <a:solidFill>
-                  <a:srgbClr val="1A1A1A"/>
-                </a:solidFill>
-                <a:latin typeface="Calibri" pitchFamily="34" charset="0"/>
-                <a:ea typeface="Calibri" pitchFamily="34" charset="-122"/>
-                <a:cs typeface="Calibri" pitchFamily="34" charset="-120"/>
-              </a:rPr>
-              <a:t>Түсім нақты уақытта</a:t>
-            </a:r>
-            <a:endParaRPr lang="en-US" sz="1700" dirty="0"/>
-          </a:p>
-        </p:txBody>
-      </p:sp>
-      <p:sp>
-        <p:nvSpPr>
-          <p:cNvPr id="14" name="Text 12"/>
-          <p:cNvSpPr txBox="1"/>
-          <p:nvPr/>
-        </p:nvSpPr>
-        <p:spPr>
-          <a:xfrm>
-            <a:off x="548640" y="1517904"/>
-            <a:ext cx="4846320" cy="365760"/>
-          </a:xfrm>
-          <a:prstGeom prst="rect">
-            <a:avLst/>
-          </a:prstGeom>
-          <a:noFill/>
-          <a:ln/>
-        </p:spPr>
-        <p:txBody>
-          <a:bodyPr wrap="square" lIns="0" tIns="0" rIns="0" bIns="0" rtlCol="0" anchor="ctr"/>
-          <a:lstStyle/>
-          <a:p>
-            <a:pPr indent="0" marL="0">
-              <a:buNone/>
-            </a:pPr>
-            <a:r>
-              <a:rPr lang="en-US" sz="1300" dirty="0">
-                <a:solidFill>
-                  <a:srgbClr val="6B7770"/>
-                </a:solidFill>
-                <a:latin typeface="Calibri" pitchFamily="34" charset="0"/>
-                <a:ea typeface="Calibri" pitchFamily="34" charset="-122"/>
-                <a:cs typeface="Calibri" pitchFamily="34" charset="-120"/>
-              </a:rPr>
-              <a:t>Дүкенде болмасаңыз да — қанша сатылды, көрінеді</a:t>
-            </a:r>
-            <a:endParaRPr lang="en-US" sz="1300" dirty="0"/>
-          </a:p>
-        </p:txBody>
-      </p:sp>
-      <p:sp>
-        <p:nvSpPr>
-          <p:cNvPr id="15" name="Text 13"/>
-          <p:cNvSpPr txBox="1"/>
-          <p:nvPr/>
-        </p:nvSpPr>
-        <p:spPr>
-          <a:xfrm>
-            <a:off x="548640" y="2057400"/>
-            <a:ext cx="4846320" cy="320040"/>
-          </a:xfrm>
-          <a:prstGeom prst="rect">
-            <a:avLst/>
-          </a:prstGeom>
-          <a:noFill/>
-          <a:ln/>
-        </p:spPr>
-        <p:txBody>
-          <a:bodyPr wrap="square" lIns="0" tIns="0" rIns="0" bIns="0" rtlCol="0" anchor="ctr"/>
-          <a:lstStyle/>
-          <a:p>
-            <a:pPr indent="0" marL="0">
-              <a:buNone/>
-            </a:pPr>
-            <a:r>
-              <a:rPr lang="en-US" sz="1700" b="1" dirty="0">
-                <a:solidFill>
-                  <a:srgbClr val="1A1A1A"/>
-                </a:solidFill>
-                <a:latin typeface="Calibri" pitchFamily="34" charset="0"/>
-                <a:ea typeface="Calibri" pitchFamily="34" charset="-122"/>
-                <a:cs typeface="Calibri" pitchFamily="34" charset="-120"/>
-              </a:rPr>
-              <a:t>Пайда, орташа чек</a:t>
-            </a:r>
-            <a:endParaRPr lang="en-US" sz="1700" dirty="0"/>
-          </a:p>
-        </p:txBody>
-      </p:sp>
-      <p:sp>
-        <p:nvSpPr>
-          <p:cNvPr id="16" name="Text 14"/>
-          <p:cNvSpPr txBox="1"/>
-          <p:nvPr/>
-        </p:nvSpPr>
-        <p:spPr>
-          <a:xfrm>
-            <a:off x="548640" y="2386584"/>
-            <a:ext cx="4846320" cy="365760"/>
-          </a:xfrm>
-          <a:prstGeom prst="rect">
-            <a:avLst/>
-          </a:prstGeom>
-          <a:noFill/>
-          <a:ln/>
-        </p:spPr>
-        <p:txBody>
-          <a:bodyPr wrap="square" lIns="0" tIns="0" rIns="0" bIns="0" rtlCol="0" anchor="ctr"/>
-          <a:lstStyle/>
-          <a:p>
-            <a:pPr indent="0" marL="0">
-              <a:buNone/>
-            </a:pPr>
-            <a:r>
-              <a:rPr lang="en-US" sz="1300" dirty="0">
-                <a:solidFill>
-                  <a:srgbClr val="6B7770"/>
-                </a:solidFill>
-                <a:latin typeface="Calibri" pitchFamily="34" charset="0"/>
-                <a:ea typeface="Calibri" pitchFamily="34" charset="-122"/>
-                <a:cs typeface="Calibri" pitchFamily="34" charset="-120"/>
-              </a:rPr>
-              <a:t>Тек түсім емес — өзіндік құн шегерілген нақты пайда</a:t>
-            </a:r>
-            <a:endParaRPr lang="en-US" sz="1300" dirty="0"/>
-          </a:p>
-        </p:txBody>
-      </p:sp>
-      <p:sp>
-        <p:nvSpPr>
-          <p:cNvPr id="17" name="Text 15"/>
-          <p:cNvSpPr txBox="1"/>
-          <p:nvPr/>
-        </p:nvSpPr>
-        <p:spPr>
-          <a:xfrm>
-            <a:off x="548640" y="2926080"/>
-            <a:ext cx="4846320" cy="320040"/>
-          </a:xfrm>
-          <a:prstGeom prst="rect">
-            <a:avLst/>
-          </a:prstGeom>
-          <a:noFill/>
-          <a:ln/>
-        </p:spPr>
-        <p:txBody>
-          <a:bodyPr wrap="square" lIns="0" tIns="0" rIns="0" bIns="0" rtlCol="0" anchor="ctr"/>
-          <a:lstStyle/>
-          <a:p>
-            <a:pPr indent="0" marL="0">
-              <a:buNone/>
-            </a:pPr>
-            <a:r>
-              <a:rPr lang="en-US" sz="1700" b="1" dirty="0">
-                <a:solidFill>
-                  <a:srgbClr val="1A1A1A"/>
-                </a:solidFill>
-                <a:latin typeface="Calibri" pitchFamily="34" charset="0"/>
-                <a:ea typeface="Calibri" pitchFamily="34" charset="-122"/>
-                <a:cs typeface="Calibri" pitchFamily="34" charset="-120"/>
-              </a:rPr>
-              <a:t>Шоттардағы ақша</a:t>
-            </a:r>
-            <a:endParaRPr lang="en-US" sz="1700" dirty="0"/>
-          </a:p>
-        </p:txBody>
-      </p:sp>
-      <p:sp>
-        <p:nvSpPr>
-          <p:cNvPr id="18" name="Text 16"/>
-          <p:cNvSpPr txBox="1"/>
-          <p:nvPr/>
-        </p:nvSpPr>
-        <p:spPr>
-          <a:xfrm>
-            <a:off x="548640" y="3255264"/>
-            <a:ext cx="4846320" cy="365760"/>
-          </a:xfrm>
-          <a:prstGeom prst="rect">
-            <a:avLst/>
-          </a:prstGeom>
-          <a:noFill/>
-          <a:ln/>
-        </p:spPr>
-        <p:txBody>
-          <a:bodyPr wrap="square" lIns="0" tIns="0" rIns="0" bIns="0" rtlCol="0" anchor="ctr"/>
-          <a:lstStyle/>
-          <a:p>
-            <a:pPr indent="0" marL="0">
-              <a:buNone/>
-            </a:pPr>
-            <a:r>
-              <a:rPr lang="en-US" sz="1300" dirty="0">
-                <a:solidFill>
-                  <a:srgbClr val="6B7770"/>
-                </a:solidFill>
-                <a:latin typeface="Calibri" pitchFamily="34" charset="0"/>
-                <a:ea typeface="Calibri" pitchFamily="34" charset="-122"/>
-                <a:cs typeface="Calibri" pitchFamily="34" charset="-120"/>
-              </a:rPr>
-              <a:t>Кассада қанша, Kaspi-де қанша — бір экранда</a:t>
-            </a:r>
-            <a:endParaRPr lang="en-US" sz="1300" dirty="0"/>
-          </a:p>
-        </p:txBody>
-      </p:sp>
-      <p:sp>
-        <p:nvSpPr>
-          <p:cNvPr id="19" name="Text 17"/>
-          <p:cNvSpPr txBox="1"/>
-          <p:nvPr/>
-        </p:nvSpPr>
-        <p:spPr>
-          <a:xfrm>
-            <a:off x="548640" y="3794760"/>
-            <a:ext cx="4846320" cy="320040"/>
-          </a:xfrm>
-          <a:prstGeom prst="rect">
-            <a:avLst/>
-          </a:prstGeom>
-          <a:noFill/>
-          <a:ln/>
-        </p:spPr>
-        <p:txBody>
-          <a:bodyPr wrap="square" lIns="0" tIns="0" rIns="0" bIns="0" rtlCol="0" anchor="ctr"/>
-          <a:lstStyle/>
-          <a:p>
-            <a:pPr indent="0" marL="0">
-              <a:buNone/>
-            </a:pPr>
-            <a:r>
-              <a:rPr lang="en-US" sz="1700" b="1" dirty="0">
-                <a:solidFill>
-                  <a:srgbClr val="1A1A1A"/>
-                </a:solidFill>
-                <a:latin typeface="Calibri" pitchFamily="34" charset="0"/>
-                <a:ea typeface="Calibri" pitchFamily="34" charset="-122"/>
-                <a:cs typeface="Calibri" pitchFamily="34" charset="-120"/>
-              </a:rPr>
-              <a:t>Кешкі есеп</a:t>
-            </a:r>
-            <a:endParaRPr lang="en-US" sz="1700" dirty="0"/>
-          </a:p>
-        </p:txBody>
-      </p:sp>
-      <p:sp>
-        <p:nvSpPr>
-          <p:cNvPr id="20" name="Text 18"/>
-          <p:cNvSpPr txBox="1"/>
-          <p:nvPr/>
-        </p:nvSpPr>
-        <p:spPr>
-          <a:xfrm>
-            <a:off x="548640" y="4123944"/>
-            <a:ext cx="4846320" cy="365760"/>
-          </a:xfrm>
-          <a:prstGeom prst="rect">
-            <a:avLst/>
-          </a:prstGeom>
-          <a:noFill/>
-          <a:ln/>
-        </p:spPr>
-        <p:txBody>
-          <a:bodyPr wrap="square" lIns="0" tIns="0" rIns="0" bIns="0" rtlCol="0" anchor="ctr"/>
-          <a:lstStyle/>
-          <a:p>
-            <a:pPr indent="0" marL="0">
-              <a:buNone/>
-            </a:pPr>
-            <a:r>
-              <a:rPr lang="en-US" sz="1300" dirty="0">
-                <a:solidFill>
-                  <a:srgbClr val="6B7770"/>
-                </a:solidFill>
-                <a:latin typeface="Calibri" pitchFamily="34" charset="0"/>
-                <a:ea typeface="Calibri" pitchFamily="34" charset="-122"/>
-                <a:cs typeface="Calibri" pitchFamily="34" charset="-120"/>
-              </a:rPr>
-              <a:t>Telegram немесе WhatsApp-қа өзі келеді</a:t>
-            </a:r>
-            <a:endParaRPr lang="en-US" sz="1300" dirty="0"/>
           </a:p>
         </p:txBody>
       </p:sp>
@@ -8679,7 +9182,7 @@
                 <a:ea typeface="Cambria" pitchFamily="34" charset="-122"/>
                 <a:cs typeface="Cambria" pitchFamily="34" charset="-120"/>
               </a:rPr>
-              <a:t>Бағаны салыстырыңыз</a:t>
+              <a:t>Телефоннан — дүкен алақанда</a:t>
             </a:r>
             <a:endParaRPr lang="en-US" sz="3000" dirty="0"/>
           </a:p>
@@ -8687,30 +9190,74 @@
       </p:sp>
       <p:sp>
         <p:nvSpPr>
-          <p:cNvPr id="3" name="Text 1"/>
-          <p:cNvSpPr txBox="1"/>
-          <p:nvPr/>
-        </p:nvSpPr>
-        <p:spPr>
-          <a:xfrm>
-            <a:off x="548640" y="914400"/>
-            <a:ext cx="8229600" cy="320040"/>
-          </a:xfrm>
-          <a:prstGeom prst="rect">
-            <a:avLst/>
-          </a:prstGeom>
-          <a:noFill/>
-          <a:ln/>
-        </p:spPr>
-        <p:txBody>
-          <a:bodyPr wrap="square" lIns="0" tIns="0" rIns="0" bIns="0" rtlCol="0" anchor="ctr"/>
-          <a:lstStyle/>
-          <a:p>
-            <a:pPr indent="0" marL="0">
-              <a:buNone/>
-            </a:pPr>
-            <a:r>
-              <a:rPr lang="en-US" sz="1200" dirty="0">
+          <p:cNvPr id="3" name="Shape 1"/>
+          <p:cNvSpPr/>
+          <p:nvPr/>
+        </p:nvSpPr>
+        <p:spPr>
+          <a:xfrm>
+            <a:off x="5760720" y="1097280"/>
+            <a:ext cx="2377440" cy="3566160"/>
+          </a:xfrm>
+          <a:prstGeom prst="roundRect">
+            <a:avLst>
+              <a:gd name="adj" fmla="val 11538"/>
+            </a:avLst>
+          </a:prstGeom>
+          <a:solidFill>
+            <a:srgbClr val="0F3D2E"/>
+          </a:solidFill>
+          <a:ln/>
+        </p:spPr>
+      </p:sp>
+      <p:sp>
+        <p:nvSpPr>
+          <p:cNvPr id="4" name="Shape 2"/>
+          <p:cNvSpPr/>
+          <p:nvPr/>
+        </p:nvSpPr>
+        <p:spPr>
+          <a:xfrm>
+            <a:off x="5897880" y="1371600"/>
+            <a:ext cx="2103120" cy="3108960"/>
+          </a:xfrm>
+          <a:prstGeom prst="roundRect">
+            <a:avLst>
+              <a:gd name="adj" fmla="val 6522"/>
+            </a:avLst>
+          </a:prstGeom>
+          <a:solidFill>
+            <a:srgbClr val="F4F6F3"/>
+          </a:solidFill>
+          <a:ln/>
+        </p:spPr>
+      </p:sp>
+      <p:sp>
+        <p:nvSpPr>
+          <p:cNvPr id="5" name="Text 3"/>
+          <p:cNvSpPr txBox="1"/>
+          <p:nvPr/>
+        </p:nvSpPr>
+        <p:spPr>
+          <a:xfrm>
+            <a:off x="6035040" y="1463040"/>
+            <a:ext cx="1828800" cy="274320"/>
+          </a:xfrm>
+          <a:prstGeom prst="rect">
+            <a:avLst/>
+          </a:prstGeom>
+          <a:noFill/>
+          <a:ln/>
+        </p:spPr>
+        <p:txBody>
+          <a:bodyPr wrap="square" lIns="0" tIns="0" rIns="0" bIns="0" rtlCol="0" anchor="ctr"/>
+          <a:lstStyle/>
+          <a:p>
+            <a:pPr indent="0" marL="0">
+              <a:buNone/>
+            </a:pPr>
+            <a:r>
+              <a:rPr lang="en-US" sz="1100" dirty="0">
                 <a:solidFill>
                   <a:srgbClr val="6B7770"/>
                 </a:solidFill>
@@ -8718,54 +9265,194 @@
                 <a:ea typeface="Calibri" pitchFamily="34" charset="-122"/>
                 <a:cs typeface="Calibri" pitchFamily="34" charset="-120"/>
               </a:rPr>
-              <a:t>Айлық төлем, теңге. Ресми сайттардан, 2026 жылғы қыркүйек</a:t>
-            </a:r>
-            <a:endParaRPr lang="en-US" sz="1200" dirty="0"/>
-          </a:p>
-        </p:txBody>
-      </p:sp>
-      <p:graphicFrame>
-        <p:nvGraphicFramePr>
-          <p:cNvPr id="4" name="Chart 0" descr=""/>
-          <p:cNvGraphicFramePr/>
-          <p:nvPr/>
-        </p:nvGraphicFramePr>
-        <p:xfrm>
-          <a:off x="548640" y="1280160"/>
-          <a:ext cx="5120640" cy="3291840"/>
-        </p:xfrm>
-        <a:graphic xmlns:a="http://schemas.openxmlformats.org/drawingml/2006/main">
-          <a:graphicData uri="http://schemas.openxmlformats.org/drawingml/2006/chart">
-            <c:chart xmlns:c="http://schemas.openxmlformats.org/drawingml/2006/chart" r:id="rId1"/>
-          </a:graphicData>
-        </a:graphic>
-      </p:graphicFrame>
-      <p:sp>
-        <p:nvSpPr>
-          <p:cNvPr id="5" name="Text 2"/>
-          <p:cNvSpPr txBox="1"/>
-          <p:nvPr/>
-        </p:nvSpPr>
-        <p:spPr>
-          <a:xfrm>
-            <a:off x="5943600" y="1280160"/>
-            <a:ext cx="2743200" cy="320040"/>
-          </a:xfrm>
-          <a:prstGeom prst="rect">
-            <a:avLst/>
-          </a:prstGeom>
-          <a:noFill/>
-          <a:ln/>
-        </p:spPr>
-        <p:txBody>
-          <a:bodyPr wrap="square" lIns="0" tIns="0" rIns="0" bIns="0" rtlCol="0" anchor="ctr"/>
-          <a:lstStyle/>
-          <a:p>
-            <a:pPr indent="0" marL="0">
-              <a:buNone/>
-            </a:pPr>
-            <a:r>
-              <a:rPr lang="en-US" sz="1500" b="1" dirty="0">
+              <a:t>Бүгін</a:t>
+            </a:r>
+            <a:endParaRPr lang="en-US" sz="1100" dirty="0"/>
+          </a:p>
+        </p:txBody>
+      </p:sp>
+      <p:sp>
+        <p:nvSpPr>
+          <p:cNvPr id="6" name="Text 4"/>
+          <p:cNvSpPr txBox="1"/>
+          <p:nvPr/>
+        </p:nvSpPr>
+        <p:spPr>
+          <a:xfrm>
+            <a:off x="6035040" y="1737360"/>
+            <a:ext cx="1828800" cy="228600"/>
+          </a:xfrm>
+          <a:prstGeom prst="rect">
+            <a:avLst/>
+          </a:prstGeom>
+          <a:noFill/>
+          <a:ln/>
+        </p:spPr>
+        <p:txBody>
+          <a:bodyPr wrap="square" lIns="0" tIns="0" rIns="0" bIns="0" rtlCol="0" anchor="ctr"/>
+          <a:lstStyle/>
+          <a:p>
+            <a:pPr indent="0" marL="0">
+              <a:buNone/>
+            </a:pPr>
+            <a:r>
+              <a:rPr lang="en-US" sz="900" dirty="0">
+                <a:solidFill>
+                  <a:srgbClr val="6B7770"/>
+                </a:solidFill>
+                <a:latin typeface="Calibri" pitchFamily="34" charset="0"/>
+                <a:ea typeface="Calibri" pitchFamily="34" charset="-122"/>
+                <a:cs typeface="Calibri" pitchFamily="34" charset="-120"/>
+              </a:rPr>
+              <a:t>Түсім</a:t>
+            </a:r>
+            <a:endParaRPr lang="en-US" sz="900" dirty="0"/>
+          </a:p>
+        </p:txBody>
+      </p:sp>
+      <p:sp>
+        <p:nvSpPr>
+          <p:cNvPr id="7" name="Text 5"/>
+          <p:cNvSpPr txBox="1"/>
+          <p:nvPr/>
+        </p:nvSpPr>
+        <p:spPr>
+          <a:xfrm>
+            <a:off x="6035040" y="1938528"/>
+            <a:ext cx="1828800" cy="365760"/>
+          </a:xfrm>
+          <a:prstGeom prst="rect">
+            <a:avLst/>
+          </a:prstGeom>
+          <a:noFill/>
+          <a:ln/>
+        </p:spPr>
+        <p:txBody>
+          <a:bodyPr wrap="square" lIns="0" tIns="0" rIns="0" bIns="0" rtlCol="0" anchor="ctr"/>
+          <a:lstStyle/>
+          <a:p>
+            <a:pPr indent="0" marL="0">
+              <a:buNone/>
+            </a:pPr>
+            <a:r>
+              <a:rPr lang="en-US" sz="2200" b="1" dirty="0">
+                <a:solidFill>
+                  <a:srgbClr val="0F3D2E"/>
+                </a:solidFill>
+                <a:latin typeface="Cambria" pitchFamily="34" charset="0"/>
+                <a:ea typeface="Cambria" pitchFamily="34" charset="-122"/>
+                <a:cs typeface="Cambria" pitchFamily="34" charset="-120"/>
+              </a:rPr>
+              <a:t>184 500 ₸</a:t>
+            </a:r>
+            <a:endParaRPr lang="en-US" sz="2200" dirty="0"/>
+          </a:p>
+        </p:txBody>
+      </p:sp>
+      <p:sp>
+        <p:nvSpPr>
+          <p:cNvPr id="8" name="Text 6"/>
+          <p:cNvSpPr txBox="1"/>
+          <p:nvPr/>
+        </p:nvSpPr>
+        <p:spPr>
+          <a:xfrm>
+            <a:off x="6035040" y="2377440"/>
+            <a:ext cx="1828800" cy="228600"/>
+          </a:xfrm>
+          <a:prstGeom prst="rect">
+            <a:avLst/>
+          </a:prstGeom>
+          <a:noFill/>
+          <a:ln/>
+        </p:spPr>
+        <p:txBody>
+          <a:bodyPr wrap="square" lIns="0" tIns="0" rIns="0" bIns="0" rtlCol="0" anchor="ctr"/>
+          <a:lstStyle/>
+          <a:p>
+            <a:pPr indent="0" marL="0">
+              <a:buNone/>
+            </a:pPr>
+            <a:r>
+              <a:rPr lang="en-US" sz="1000" dirty="0">
+                <a:solidFill>
+                  <a:srgbClr val="1A1A1A"/>
+                </a:solidFill>
+                <a:latin typeface="Calibri" pitchFamily="34" charset="0"/>
+                <a:ea typeface="Calibri" pitchFamily="34" charset="-122"/>
+                <a:cs typeface="Calibri" pitchFamily="34" charset="-120"/>
+              </a:rPr>
+              <a:t>Чектер · 47</a:t>
+            </a:r>
+            <a:endParaRPr lang="en-US" sz="1000" dirty="0"/>
+          </a:p>
+        </p:txBody>
+      </p:sp>
+      <p:sp>
+        <p:nvSpPr>
+          <p:cNvPr id="9" name="Text 7"/>
+          <p:cNvSpPr txBox="1"/>
+          <p:nvPr/>
+        </p:nvSpPr>
+        <p:spPr>
+          <a:xfrm>
+            <a:off x="6035040" y="2606040"/>
+            <a:ext cx="1828800" cy="228600"/>
+          </a:xfrm>
+          <a:prstGeom prst="rect">
+            <a:avLst/>
+          </a:prstGeom>
+          <a:noFill/>
+          <a:ln/>
+        </p:spPr>
+        <p:txBody>
+          <a:bodyPr wrap="square" lIns="0" tIns="0" rIns="0" bIns="0" rtlCol="0" anchor="ctr"/>
+          <a:lstStyle/>
+          <a:p>
+            <a:pPr indent="0" marL="0">
+              <a:buNone/>
+            </a:pPr>
+            <a:r>
+              <a:rPr lang="en-US" sz="1000" dirty="0">
+                <a:solidFill>
+                  <a:srgbClr val="1A1A1A"/>
+                </a:solidFill>
+                <a:latin typeface="Calibri" pitchFamily="34" charset="0"/>
+                <a:ea typeface="Calibri" pitchFamily="34" charset="-122"/>
+                <a:cs typeface="Calibri" pitchFamily="34" charset="-120"/>
+              </a:rPr>
+              <a:t>Орташа чек · 3 925 ₸</a:t>
+            </a:r>
+            <a:endParaRPr lang="en-US" sz="1000" dirty="0"/>
+          </a:p>
+        </p:txBody>
+      </p:sp>
+      <p:sp>
+        <p:nvSpPr>
+          <p:cNvPr id="10" name="Text 8"/>
+          <p:cNvSpPr txBox="1"/>
+          <p:nvPr/>
+        </p:nvSpPr>
+        <p:spPr>
+          <a:xfrm>
+            <a:off x="6035040" y="2834640"/>
+            <a:ext cx="1828800" cy="228600"/>
+          </a:xfrm>
+          <a:prstGeom prst="rect">
+            <a:avLst/>
+          </a:prstGeom>
+          <a:noFill/>
+          <a:ln/>
+        </p:spPr>
+        <p:txBody>
+          <a:bodyPr wrap="square" lIns="0" tIns="0" rIns="0" bIns="0" rtlCol="0" anchor="ctr"/>
+          <a:lstStyle/>
+          <a:p>
+            <a:pPr indent="0" marL="0">
+              <a:buNone/>
+            </a:pPr>
+            <a:r>
+              <a:rPr lang="en-US" sz="1000" b="1" dirty="0">
                 <a:solidFill>
                   <a:srgbClr val="1B6B4A"/>
                 </a:solidFill>
@@ -8773,38 +9460,38 @@
                 <a:ea typeface="Calibri" pitchFamily="34" charset="-122"/>
                 <a:cs typeface="Calibri" pitchFamily="34" charset="-120"/>
               </a:rPr>
-              <a:t>Орнату тегін</a:t>
-            </a:r>
-            <a:endParaRPr lang="en-US" sz="1500" dirty="0"/>
-          </a:p>
-        </p:txBody>
-      </p:sp>
-      <p:sp>
-        <p:nvSpPr>
-          <p:cNvPr id="6" name="Text 3"/>
-          <p:cNvSpPr txBox="1"/>
-          <p:nvPr/>
-        </p:nvSpPr>
-        <p:spPr>
-          <a:xfrm>
-            <a:off x="5943600" y="1600200"/>
-            <a:ext cx="2743200" cy="320040"/>
-          </a:xfrm>
-          <a:prstGeom prst="rect">
-            <a:avLst/>
-          </a:prstGeom>
-          <a:noFill/>
-          <a:ln/>
-        </p:spPr>
-        <p:txBody>
-          <a:bodyPr wrap="square" lIns="0" tIns="0" rIns="0" bIns="0" rtlCol="0" anchor="ctr"/>
-          <a:lstStyle/>
-          <a:p>
-            <a:pPr indent="0" marL="0">
-              <a:buNone/>
-            </a:pPr>
-            <a:r>
-              <a:rPr lang="en-US" sz="1200" dirty="0">
+              <a:t>Пайда · 41 200 ₸</a:t>
+            </a:r>
+            <a:endParaRPr lang="en-US" sz="1000" dirty="0"/>
+          </a:p>
+        </p:txBody>
+      </p:sp>
+      <p:sp>
+        <p:nvSpPr>
+          <p:cNvPr id="11" name="Text 9"/>
+          <p:cNvSpPr txBox="1"/>
+          <p:nvPr/>
+        </p:nvSpPr>
+        <p:spPr>
+          <a:xfrm>
+            <a:off x="6035040" y="3200400"/>
+            <a:ext cx="1828800" cy="228600"/>
+          </a:xfrm>
+          <a:prstGeom prst="rect">
+            <a:avLst/>
+          </a:prstGeom>
+          <a:noFill/>
+          <a:ln/>
+        </p:spPr>
+        <p:txBody>
+          <a:bodyPr wrap="square" lIns="0" tIns="0" rIns="0" bIns="0" rtlCol="0" anchor="ctr"/>
+          <a:lstStyle/>
+          <a:p>
+            <a:pPr indent="0" marL="0">
+              <a:buNone/>
+            </a:pPr>
+            <a:r>
+              <a:rPr lang="en-US" sz="900" dirty="0">
                 <a:solidFill>
                   <a:srgbClr val="6B7770"/>
                 </a:solidFill>
@@ -8812,77 +9499,133 @@
                 <a:ea typeface="Calibri" pitchFamily="34" charset="-122"/>
                 <a:cs typeface="Calibri" pitchFamily="34" charset="-120"/>
               </a:rPr>
-              <a:t>UMAG: 30 000 ₸ бір рет</a:t>
-            </a:r>
-            <a:endParaRPr lang="en-US" sz="1200" dirty="0"/>
-          </a:p>
-        </p:txBody>
-      </p:sp>
-      <p:sp>
-        <p:nvSpPr>
-          <p:cNvPr id="7" name="Text 4"/>
-          <p:cNvSpPr txBox="1"/>
-          <p:nvPr/>
-        </p:nvSpPr>
-        <p:spPr>
-          <a:xfrm>
-            <a:off x="5943600" y="2103120"/>
-            <a:ext cx="2743200" cy="320040"/>
-          </a:xfrm>
-          <a:prstGeom prst="rect">
-            <a:avLst/>
-          </a:prstGeom>
-          <a:noFill/>
-          <a:ln/>
-        </p:spPr>
-        <p:txBody>
-          <a:bodyPr wrap="square" lIns="0" tIns="0" rIns="0" bIns="0" rtlCol="0" anchor="ctr"/>
-          <a:lstStyle/>
-          <a:p>
-            <a:pPr indent="0" marL="0">
-              <a:buNone/>
-            </a:pPr>
-            <a:r>
-              <a:rPr lang="en-US" sz="1500" b="1" dirty="0">
-                <a:solidFill>
-                  <a:srgbClr val="1B6B4A"/>
-                </a:solidFill>
-                <a:latin typeface="Calibri" pitchFamily="34" charset="0"/>
-                <a:ea typeface="Calibri" pitchFamily="34" charset="-122"/>
-                <a:cs typeface="Calibri" pitchFamily="34" charset="-120"/>
-              </a:rPr>
-              <a:t>Кассирге шек жоқ</a:t>
-            </a:r>
-            <a:endParaRPr lang="en-US" sz="1500" dirty="0"/>
-          </a:p>
-        </p:txBody>
-      </p:sp>
-      <p:sp>
-        <p:nvSpPr>
-          <p:cNvPr id="8" name="Text 5"/>
-          <p:cNvSpPr txBox="1"/>
-          <p:nvPr/>
-        </p:nvSpPr>
-        <p:spPr>
-          <a:xfrm>
-            <a:off x="5943600" y="2423160"/>
-            <a:ext cx="2743200" cy="320040"/>
-          </a:xfrm>
-          <a:prstGeom prst="rect">
-            <a:avLst/>
-          </a:prstGeom>
-          <a:noFill/>
-          <a:ln/>
-        </p:spPr>
-        <p:txBody>
-          <a:bodyPr wrap="square" lIns="0" tIns="0" rIns="0" bIns="0" rtlCol="0" anchor="ctr"/>
-          <a:lstStyle/>
-          <a:p>
-            <a:pPr indent="0" marL="0">
-              <a:buNone/>
-            </a:pPr>
-            <a:r>
-              <a:rPr lang="en-US" sz="1200" dirty="0">
+              <a:t>Шоттардағы ақша</a:t>
+            </a:r>
+            <a:endParaRPr lang="en-US" sz="900" dirty="0"/>
+          </a:p>
+        </p:txBody>
+      </p:sp>
+      <p:sp>
+        <p:nvSpPr>
+          <p:cNvPr id="12" name="Text 10"/>
+          <p:cNvSpPr txBox="1"/>
+          <p:nvPr/>
+        </p:nvSpPr>
+        <p:spPr>
+          <a:xfrm>
+            <a:off x="6035040" y="3401568"/>
+            <a:ext cx="1828800" cy="548640"/>
+          </a:xfrm>
+          <a:prstGeom prst="rect">
+            <a:avLst/>
+          </a:prstGeom>
+          <a:noFill/>
+          <a:ln/>
+        </p:spPr>
+        <p:txBody>
+          <a:bodyPr wrap="square" lIns="0" tIns="0" rIns="0" bIns="0" rtlCol="0" anchor="ctr"/>
+          <a:lstStyle/>
+          <a:p>
+            <a:pPr indent="0" marL="0">
+              <a:buNone/>
+            </a:pPr>
+            <a:r>
+              <a:rPr lang="en-US" sz="1000" dirty="0">
+                <a:solidFill>
+                  <a:srgbClr val="1A1A1A"/>
+                </a:solidFill>
+                <a:latin typeface="Calibri" pitchFamily="34" charset="0"/>
+                <a:ea typeface="Calibri" pitchFamily="34" charset="-122"/>
+                <a:cs typeface="Calibri" pitchFamily="34" charset="-120"/>
+              </a:rPr>
+              <a:t>Касса · 62 300 ₸</a:t>
+            </a:r>
+            <a:endParaRPr lang="en-US" sz="1000" dirty="0"/>
+          </a:p>
+          <a:p>
+            <a:pPr indent="0" marL="0">
+              <a:buNone/>
+            </a:pPr>
+            <a:r>
+              <a:rPr lang="en-US" sz="1000" dirty="0">
+                <a:solidFill>
+                  <a:srgbClr val="1A1A1A"/>
+                </a:solidFill>
+                <a:latin typeface="Calibri" pitchFamily="34" charset="0"/>
+                <a:ea typeface="Calibri" pitchFamily="34" charset="-122"/>
+                <a:cs typeface="Calibri" pitchFamily="34" charset="-120"/>
+              </a:rPr>
+              <a:t>Kaspi · 122 200 ₸</a:t>
+            </a:r>
+            <a:endParaRPr lang="en-US" sz="1000" dirty="0"/>
+          </a:p>
+        </p:txBody>
+      </p:sp>
+      <p:sp>
+        <p:nvSpPr>
+          <p:cNvPr id="13" name="Text 11"/>
+          <p:cNvSpPr txBox="1"/>
+          <p:nvPr/>
+        </p:nvSpPr>
+        <p:spPr>
+          <a:xfrm>
+            <a:off x="548640" y="1188720"/>
+            <a:ext cx="4846320" cy="320040"/>
+          </a:xfrm>
+          <a:prstGeom prst="rect">
+            <a:avLst/>
+          </a:prstGeom>
+          <a:noFill/>
+          <a:ln/>
+        </p:spPr>
+        <p:txBody>
+          <a:bodyPr wrap="square" lIns="0" tIns="0" rIns="0" bIns="0" rtlCol="0" anchor="ctr"/>
+          <a:lstStyle/>
+          <a:p>
+            <a:pPr indent="0" marL="0">
+              <a:buNone/>
+            </a:pPr>
+            <a:r>
+              <a:rPr lang="en-US" sz="1700" b="1" dirty="0">
+                <a:solidFill>
+                  <a:srgbClr val="1A1A1A"/>
+                </a:solidFill>
+                <a:latin typeface="Calibri" pitchFamily="34" charset="0"/>
+                <a:ea typeface="Calibri" pitchFamily="34" charset="-122"/>
+                <a:cs typeface="Calibri" pitchFamily="34" charset="-120"/>
+              </a:rPr>
+              <a:t>Түсім нақты уақытта</a:t>
+            </a:r>
+            <a:endParaRPr lang="en-US" sz="1700" dirty="0"/>
+          </a:p>
+        </p:txBody>
+      </p:sp>
+      <p:sp>
+        <p:nvSpPr>
+          <p:cNvPr id="14" name="Text 12"/>
+          <p:cNvSpPr txBox="1"/>
+          <p:nvPr/>
+        </p:nvSpPr>
+        <p:spPr>
+          <a:xfrm>
+            <a:off x="548640" y="1517904"/>
+            <a:ext cx="4846320" cy="365760"/>
+          </a:xfrm>
+          <a:prstGeom prst="rect">
+            <a:avLst/>
+          </a:prstGeom>
+          <a:noFill/>
+          <a:ln/>
+        </p:spPr>
+        <p:txBody>
+          <a:bodyPr wrap="square" lIns="0" tIns="0" rIns="0" bIns="0" rtlCol="0" anchor="ctr"/>
+          <a:lstStyle/>
+          <a:p>
+            <a:pPr indent="0" marL="0">
+              <a:buNone/>
+            </a:pPr>
+            <a:r>
+              <a:rPr lang="en-US" sz="1300" dirty="0">
                 <a:solidFill>
                   <a:srgbClr val="6B7770"/>
                 </a:solidFill>
@@ -8890,77 +9633,77 @@
                 <a:ea typeface="Calibri" pitchFamily="34" charset="-122"/>
                 <a:cs typeface="Calibri" pitchFamily="34" charset="-120"/>
               </a:rPr>
-              <a:t>Wipon: қызметкер санына тариф</a:t>
-            </a:r>
-            <a:endParaRPr lang="en-US" sz="1200" dirty="0"/>
-          </a:p>
-        </p:txBody>
-      </p:sp>
-      <p:sp>
-        <p:nvSpPr>
-          <p:cNvPr id="9" name="Text 6"/>
-          <p:cNvSpPr txBox="1"/>
-          <p:nvPr/>
-        </p:nvSpPr>
-        <p:spPr>
-          <a:xfrm>
-            <a:off x="5943600" y="2926080"/>
-            <a:ext cx="2743200" cy="320040"/>
-          </a:xfrm>
-          <a:prstGeom prst="rect">
-            <a:avLst/>
-          </a:prstGeom>
-          <a:noFill/>
-          <a:ln/>
-        </p:spPr>
-        <p:txBody>
-          <a:bodyPr wrap="square" lIns="0" tIns="0" rIns="0" bIns="0" rtlCol="0" anchor="ctr"/>
-          <a:lstStyle/>
-          <a:p>
-            <a:pPr indent="0" marL="0">
-              <a:buNone/>
-            </a:pPr>
-            <a:r>
-              <a:rPr lang="en-US" sz="1500" b="1" dirty="0">
-                <a:solidFill>
-                  <a:srgbClr val="1B6B4A"/>
-                </a:solidFill>
-                <a:latin typeface="Calibri" pitchFamily="34" charset="0"/>
-                <a:ea typeface="Calibri" pitchFamily="34" charset="-122"/>
-                <a:cs typeface="Calibri" pitchFamily="34" charset="-120"/>
-              </a:rPr>
-              <a:t>AI кіреді</a:t>
-            </a:r>
-            <a:endParaRPr lang="en-US" sz="1500" dirty="0"/>
-          </a:p>
-        </p:txBody>
-      </p:sp>
-      <p:sp>
-        <p:nvSpPr>
-          <p:cNvPr id="10" name="Text 7"/>
-          <p:cNvSpPr txBox="1"/>
-          <p:nvPr/>
-        </p:nvSpPr>
-        <p:spPr>
-          <a:xfrm>
-            <a:off x="5943600" y="3246120"/>
-            <a:ext cx="2743200" cy="320040"/>
-          </a:xfrm>
-          <a:prstGeom prst="rect">
-            <a:avLst/>
-          </a:prstGeom>
-          <a:noFill/>
-          <a:ln/>
-        </p:spPr>
-        <p:txBody>
-          <a:bodyPr wrap="square" lIns="0" tIns="0" rIns="0" bIns="0" rtlCol="0" anchor="ctr"/>
-          <a:lstStyle/>
-          <a:p>
-            <a:pPr indent="0" marL="0">
-              <a:buNone/>
-            </a:pPr>
-            <a:r>
-              <a:rPr lang="en-US" sz="1200" dirty="0">
+              <a:t>Дүкенде болмасаңыз да — қанша сатылды, көрінеді</a:t>
+            </a:r>
+            <a:endParaRPr lang="en-US" sz="1300" dirty="0"/>
+          </a:p>
+        </p:txBody>
+      </p:sp>
+      <p:sp>
+        <p:nvSpPr>
+          <p:cNvPr id="15" name="Text 13"/>
+          <p:cNvSpPr txBox="1"/>
+          <p:nvPr/>
+        </p:nvSpPr>
+        <p:spPr>
+          <a:xfrm>
+            <a:off x="548640" y="2057400"/>
+            <a:ext cx="4846320" cy="320040"/>
+          </a:xfrm>
+          <a:prstGeom prst="rect">
+            <a:avLst/>
+          </a:prstGeom>
+          <a:noFill/>
+          <a:ln/>
+        </p:spPr>
+        <p:txBody>
+          <a:bodyPr wrap="square" lIns="0" tIns="0" rIns="0" bIns="0" rtlCol="0" anchor="ctr"/>
+          <a:lstStyle/>
+          <a:p>
+            <a:pPr indent="0" marL="0">
+              <a:buNone/>
+            </a:pPr>
+            <a:r>
+              <a:rPr lang="en-US" sz="1700" b="1" dirty="0">
+                <a:solidFill>
+                  <a:srgbClr val="1A1A1A"/>
+                </a:solidFill>
+                <a:latin typeface="Calibri" pitchFamily="34" charset="0"/>
+                <a:ea typeface="Calibri" pitchFamily="34" charset="-122"/>
+                <a:cs typeface="Calibri" pitchFamily="34" charset="-120"/>
+              </a:rPr>
+              <a:t>Пайда, орташа чек</a:t>
+            </a:r>
+            <a:endParaRPr lang="en-US" sz="1700" dirty="0"/>
+          </a:p>
+        </p:txBody>
+      </p:sp>
+      <p:sp>
+        <p:nvSpPr>
+          <p:cNvPr id="16" name="Text 14"/>
+          <p:cNvSpPr txBox="1"/>
+          <p:nvPr/>
+        </p:nvSpPr>
+        <p:spPr>
+          <a:xfrm>
+            <a:off x="548640" y="2386584"/>
+            <a:ext cx="4846320" cy="365760"/>
+          </a:xfrm>
+          <a:prstGeom prst="rect">
+            <a:avLst/>
+          </a:prstGeom>
+          <a:noFill/>
+          <a:ln/>
+        </p:spPr>
+        <p:txBody>
+          <a:bodyPr wrap="square" lIns="0" tIns="0" rIns="0" bIns="0" rtlCol="0" anchor="ctr"/>
+          <a:lstStyle/>
+          <a:p>
+            <a:pPr indent="0" marL="0">
+              <a:buNone/>
+            </a:pPr>
+            <a:r>
+              <a:rPr lang="en-US" sz="1300" dirty="0">
                 <a:solidFill>
                   <a:srgbClr val="6B7770"/>
                 </a:solidFill>
@@ -8968,77 +9711,77 @@
                 <a:ea typeface="Calibri" pitchFamily="34" charset="-122"/>
                 <a:cs typeface="Calibri" pitchFamily="34" charset="-120"/>
               </a:rPr>
-              <a:t>Бәсекелестерде мүлде жоқ</a:t>
-            </a:r>
-            <a:endParaRPr lang="en-US" sz="1200" dirty="0"/>
-          </a:p>
-        </p:txBody>
-      </p:sp>
-      <p:sp>
-        <p:nvSpPr>
-          <p:cNvPr id="11" name="Text 8"/>
-          <p:cNvSpPr txBox="1"/>
-          <p:nvPr/>
-        </p:nvSpPr>
-        <p:spPr>
-          <a:xfrm>
-            <a:off x="5943600" y="3749040"/>
-            <a:ext cx="2743200" cy="320040"/>
-          </a:xfrm>
-          <a:prstGeom prst="rect">
-            <a:avLst/>
-          </a:prstGeom>
-          <a:noFill/>
-          <a:ln/>
-        </p:spPr>
-        <p:txBody>
-          <a:bodyPr wrap="square" lIns="0" tIns="0" rIns="0" bIns="0" rtlCol="0" anchor="ctr"/>
-          <a:lstStyle/>
-          <a:p>
-            <a:pPr indent="0" marL="0">
-              <a:buNone/>
-            </a:pPr>
-            <a:r>
-              <a:rPr lang="en-US" sz="1500" b="1" dirty="0">
-                <a:solidFill>
-                  <a:srgbClr val="1B6B4A"/>
-                </a:solidFill>
-                <a:latin typeface="Calibri" pitchFamily="34" charset="0"/>
-                <a:ea typeface="Calibri" pitchFamily="34" charset="-122"/>
-                <a:cs typeface="Calibri" pitchFamily="34" charset="-120"/>
-              </a:rPr>
-              <a:t>14 күн тегін</a:t>
-            </a:r>
-            <a:endParaRPr lang="en-US" sz="1500" dirty="0"/>
-          </a:p>
-        </p:txBody>
-      </p:sp>
-      <p:sp>
-        <p:nvSpPr>
-          <p:cNvPr id="12" name="Text 9"/>
-          <p:cNvSpPr txBox="1"/>
-          <p:nvPr/>
-        </p:nvSpPr>
-        <p:spPr>
-          <a:xfrm>
-            <a:off x="5943600" y="4069080"/>
-            <a:ext cx="2743200" cy="320040"/>
-          </a:xfrm>
-          <a:prstGeom prst="rect">
-            <a:avLst/>
-          </a:prstGeom>
-          <a:noFill/>
-          <a:ln/>
-        </p:spPr>
-        <p:txBody>
-          <a:bodyPr wrap="square" lIns="0" tIns="0" rIns="0" bIns="0" rtlCol="0" anchor="ctr"/>
-          <a:lstStyle/>
-          <a:p>
-            <a:pPr indent="0" marL="0">
-              <a:buNone/>
-            </a:pPr>
-            <a:r>
-              <a:rPr lang="en-US" sz="1200" dirty="0">
+              <a:t>Тек түсім емес — өзіндік құн шегерілген нақты пайда</a:t>
+            </a:r>
+            <a:endParaRPr lang="en-US" sz="1300" dirty="0"/>
+          </a:p>
+        </p:txBody>
+      </p:sp>
+      <p:sp>
+        <p:nvSpPr>
+          <p:cNvPr id="17" name="Text 15"/>
+          <p:cNvSpPr txBox="1"/>
+          <p:nvPr/>
+        </p:nvSpPr>
+        <p:spPr>
+          <a:xfrm>
+            <a:off x="548640" y="2926080"/>
+            <a:ext cx="4846320" cy="320040"/>
+          </a:xfrm>
+          <a:prstGeom prst="rect">
+            <a:avLst/>
+          </a:prstGeom>
+          <a:noFill/>
+          <a:ln/>
+        </p:spPr>
+        <p:txBody>
+          <a:bodyPr wrap="square" lIns="0" tIns="0" rIns="0" bIns="0" rtlCol="0" anchor="ctr"/>
+          <a:lstStyle/>
+          <a:p>
+            <a:pPr indent="0" marL="0">
+              <a:buNone/>
+            </a:pPr>
+            <a:r>
+              <a:rPr lang="en-US" sz="1700" b="1" dirty="0">
+                <a:solidFill>
+                  <a:srgbClr val="1A1A1A"/>
+                </a:solidFill>
+                <a:latin typeface="Calibri" pitchFamily="34" charset="0"/>
+                <a:ea typeface="Calibri" pitchFamily="34" charset="-122"/>
+                <a:cs typeface="Calibri" pitchFamily="34" charset="-120"/>
+              </a:rPr>
+              <a:t>Шоттардағы ақша</a:t>
+            </a:r>
+            <a:endParaRPr lang="en-US" sz="1700" dirty="0"/>
+          </a:p>
+        </p:txBody>
+      </p:sp>
+      <p:sp>
+        <p:nvSpPr>
+          <p:cNvPr id="18" name="Text 16"/>
+          <p:cNvSpPr txBox="1"/>
+          <p:nvPr/>
+        </p:nvSpPr>
+        <p:spPr>
+          <a:xfrm>
+            <a:off x="548640" y="3255264"/>
+            <a:ext cx="4846320" cy="365760"/>
+          </a:xfrm>
+          <a:prstGeom prst="rect">
+            <a:avLst/>
+          </a:prstGeom>
+          <a:noFill/>
+          <a:ln/>
+        </p:spPr>
+        <p:txBody>
+          <a:bodyPr wrap="square" lIns="0" tIns="0" rIns="0" bIns="0" rtlCol="0" anchor="ctr"/>
+          <a:lstStyle/>
+          <a:p>
+            <a:pPr indent="0" marL="0">
+              <a:buNone/>
+            </a:pPr>
+            <a:r>
+              <a:rPr lang="en-US" sz="1300" dirty="0">
                 <a:solidFill>
                   <a:srgbClr val="6B7770"/>
                 </a:solidFill>
@@ -9046,9 +9789,87 @@
                 <a:ea typeface="Calibri" pitchFamily="34" charset="-122"/>
                 <a:cs typeface="Calibri" pitchFamily="34" charset="-120"/>
               </a:rPr>
-              <a:t>Картасыз, міндеттемесіз</a:t>
-            </a:r>
-            <a:endParaRPr lang="en-US" sz="1200" dirty="0"/>
+              <a:t>Кассада қанша, Kaspi-де қанша — бір экранда</a:t>
+            </a:r>
+            <a:endParaRPr lang="en-US" sz="1300" dirty="0"/>
+          </a:p>
+        </p:txBody>
+      </p:sp>
+      <p:sp>
+        <p:nvSpPr>
+          <p:cNvPr id="19" name="Text 17"/>
+          <p:cNvSpPr txBox="1"/>
+          <p:nvPr/>
+        </p:nvSpPr>
+        <p:spPr>
+          <a:xfrm>
+            <a:off x="548640" y="3794760"/>
+            <a:ext cx="4846320" cy="320040"/>
+          </a:xfrm>
+          <a:prstGeom prst="rect">
+            <a:avLst/>
+          </a:prstGeom>
+          <a:noFill/>
+          <a:ln/>
+        </p:spPr>
+        <p:txBody>
+          <a:bodyPr wrap="square" lIns="0" tIns="0" rIns="0" bIns="0" rtlCol="0" anchor="ctr"/>
+          <a:lstStyle/>
+          <a:p>
+            <a:pPr indent="0" marL="0">
+              <a:buNone/>
+            </a:pPr>
+            <a:r>
+              <a:rPr lang="en-US" sz="1700" b="1" dirty="0">
+                <a:solidFill>
+                  <a:srgbClr val="1A1A1A"/>
+                </a:solidFill>
+                <a:latin typeface="Calibri" pitchFamily="34" charset="0"/>
+                <a:ea typeface="Calibri" pitchFamily="34" charset="-122"/>
+                <a:cs typeface="Calibri" pitchFamily="34" charset="-120"/>
+              </a:rPr>
+              <a:t>Кешкі есеп</a:t>
+            </a:r>
+            <a:endParaRPr lang="en-US" sz="1700" dirty="0"/>
+          </a:p>
+        </p:txBody>
+      </p:sp>
+      <p:sp>
+        <p:nvSpPr>
+          <p:cNvPr id="20" name="Text 18"/>
+          <p:cNvSpPr txBox="1"/>
+          <p:nvPr/>
+        </p:nvSpPr>
+        <p:spPr>
+          <a:xfrm>
+            <a:off x="548640" y="4123944"/>
+            <a:ext cx="4846320" cy="365760"/>
+          </a:xfrm>
+          <a:prstGeom prst="rect">
+            <a:avLst/>
+          </a:prstGeom>
+          <a:noFill/>
+          <a:ln/>
+        </p:spPr>
+        <p:txBody>
+          <a:bodyPr wrap="square" lIns="0" tIns="0" rIns="0" bIns="0" rtlCol="0" anchor="ctr"/>
+          <a:lstStyle/>
+          <a:p>
+            <a:pPr indent="0" marL="0">
+              <a:buNone/>
+            </a:pPr>
+            <a:r>
+              <a:rPr lang="en-US" sz="1300" dirty="0">
+                <a:solidFill>
+                  <a:srgbClr val="6B7770"/>
+                </a:solidFill>
+                <a:latin typeface="Calibri" pitchFamily="34" charset="0"/>
+                <a:ea typeface="Calibri" pitchFamily="34" charset="-122"/>
+                <a:cs typeface="Calibri" pitchFamily="34" charset="-120"/>
+              </a:rPr>
+              <a:t>Telegram немесе WhatsApp-қа өзі келеді</a:t>
+            </a:r>
+            <a:endParaRPr lang="en-US" sz="1300" dirty="0"/>
           </a:p>
         </p:txBody>
       </p:sp>
@@ -9066,7 +9887,7 @@
     <p:bg>
       <p:bgPr>
         <a:solidFill>
-          <a:srgbClr val="F4F6F3"/>
+          <a:srgbClr val="FFFFFF"/>
         </a:solidFill>
       </p:bgPr>
     </p:bg>
@@ -9117,7 +9938,7 @@
                 <a:ea typeface="Cambria" pitchFamily="34" charset="-122"/>
                 <a:cs typeface="Cambria" pitchFamily="34" charset="-120"/>
               </a:rPr>
-              <a:t>Тарифтер</a:t>
+              <a:t>Бірінші жылдың құны</a:t>
             </a:r>
             <a:endParaRPr lang="en-US" sz="3000" dirty="0"/>
           </a:p>
@@ -9125,119 +9946,108 @@
       </p:sp>
       <p:sp>
         <p:nvSpPr>
-          <p:cNvPr id="3" name="Shape 1"/>
-          <p:cNvSpPr/>
-          <p:nvPr/>
-        </p:nvSpPr>
-        <p:spPr>
-          <a:xfrm>
-            <a:off x="548640" y="1097280"/>
-            <a:ext cx="3931920" cy="3566160"/>
-          </a:xfrm>
-          <a:prstGeom prst="roundRect">
-            <a:avLst>
-              <a:gd name="adj" fmla="val 3077"/>
-            </a:avLst>
-          </a:prstGeom>
-          <a:solidFill>
-            <a:srgbClr val="FFFFFF"/>
-          </a:solidFill>
-          <a:ln w="12700">
-            <a:solidFill>
-              <a:srgbClr val="E8EFE9"/>
-            </a:solidFill>
-            <a:prstDash val="solid"/>
-          </a:ln>
-        </p:spPr>
-      </p:sp>
-      <p:sp>
-        <p:nvSpPr>
-          <p:cNvPr id="4" name="Text 2"/>
-          <p:cNvSpPr txBox="1"/>
-          <p:nvPr/>
-        </p:nvSpPr>
-        <p:spPr>
-          <a:xfrm>
-            <a:off x="822960" y="1280160"/>
-            <a:ext cx="3383280" cy="365760"/>
-          </a:xfrm>
-          <a:prstGeom prst="rect">
-            <a:avLst/>
-          </a:prstGeom>
-          <a:noFill/>
-          <a:ln/>
-        </p:spPr>
-        <p:txBody>
-          <a:bodyPr wrap="square" lIns="0" tIns="0" rIns="0" bIns="0" rtlCol="0" anchor="ctr"/>
-          <a:lstStyle/>
-          <a:p>
-            <a:pPr indent="0" marL="0">
-              <a:buNone/>
-            </a:pPr>
-            <a:r>
-              <a:rPr lang="en-US" sz="2000" b="1" dirty="0">
-                <a:solidFill>
-                  <a:srgbClr val="0F3D2E"/>
-                </a:solidFill>
-                <a:latin typeface="Calibri" pitchFamily="34" charset="0"/>
-                <a:ea typeface="Calibri" pitchFamily="34" charset="-122"/>
-                <a:cs typeface="Calibri" pitchFamily="34" charset="-120"/>
-              </a:rPr>
-              <a:t>Старт</a:t>
-            </a:r>
-            <a:endParaRPr lang="en-US" sz="2000" dirty="0"/>
-          </a:p>
-        </p:txBody>
-      </p:sp>
-      <p:sp>
-        <p:nvSpPr>
-          <p:cNvPr id="5" name="Text 3"/>
-          <p:cNvSpPr txBox="1"/>
-          <p:nvPr/>
-        </p:nvSpPr>
-        <p:spPr>
-          <a:xfrm>
-            <a:off x="822960" y="1645920"/>
-            <a:ext cx="3383280" cy="640080"/>
-          </a:xfrm>
-          <a:prstGeom prst="rect">
-            <a:avLst/>
-          </a:prstGeom>
-          <a:noFill/>
-          <a:ln/>
-        </p:spPr>
-        <p:txBody>
-          <a:bodyPr wrap="square" lIns="0" tIns="0" rIns="0" bIns="0" rtlCol="0" anchor="ctr"/>
-          <a:lstStyle/>
-          <a:p>
-            <a:pPr indent="0" marL="0">
-              <a:buNone/>
-            </a:pPr>
-            <a:r>
-              <a:rPr lang="en-US" sz="4000" b="1" dirty="0">
+          <p:cNvPr id="3" name="Text 1"/>
+          <p:cNvSpPr txBox="1"/>
+          <p:nvPr/>
+        </p:nvSpPr>
+        <p:spPr>
+          <a:xfrm>
+            <a:off x="548640" y="914400"/>
+            <a:ext cx="8229600" cy="320040"/>
+          </a:xfrm>
+          <a:prstGeom prst="rect">
+            <a:avLst/>
+          </a:prstGeom>
+          <a:noFill/>
+          <a:ln/>
+        </p:spPr>
+        <p:txBody>
+          <a:bodyPr wrap="square" lIns="0" tIns="0" rIns="0" bIns="0" rtlCol="0" anchor="ctr"/>
+          <a:lstStyle/>
+          <a:p>
+            <a:pPr indent="0" marL="0">
+              <a:buNone/>
+            </a:pPr>
+            <a:r>
+              <a:rPr lang="en-US" sz="1200" dirty="0">
+                <a:solidFill>
+                  <a:srgbClr val="6B7770"/>
+                </a:solidFill>
+                <a:latin typeface="Calibri" pitchFamily="34" charset="0"/>
+                <a:ea typeface="Calibri" pitchFamily="34" charset="-122"/>
+                <a:cs typeface="Calibri" pitchFamily="34" charset="-120"/>
+              </a:rPr>
+              <a:t>Толық тариф + орнату, бірінші жыл. Ресми сайттардан, 2026 жылғы қыркүйек</a:t>
+            </a:r>
+            <a:endParaRPr lang="en-US" sz="1200" dirty="0"/>
+          </a:p>
+        </p:txBody>
+      </p:sp>
+      <p:graphicFrame>
+        <p:nvGraphicFramePr>
+          <p:cNvPr id="4" name="Chart 0" descr=""/>
+          <p:cNvGraphicFramePr/>
+          <p:nvPr/>
+        </p:nvGraphicFramePr>
+        <p:xfrm>
+          <a:off x="548640" y="1280160"/>
+          <a:ext cx="5120640" cy="3291840"/>
+        </p:xfrm>
+        <a:graphic xmlns:a="http://schemas.openxmlformats.org/drawingml/2006/main">
+          <a:graphicData uri="http://schemas.openxmlformats.org/drawingml/2006/chart">
+            <c:chart xmlns:c="http://schemas.openxmlformats.org/drawingml/2006/chart" r:id="rId1"/>
+          </a:graphicData>
+        </a:graphic>
+      </p:graphicFrame>
+      <p:sp>
+        <p:nvSpPr>
+          <p:cNvPr id="5" name="Text 2"/>
+          <p:cNvSpPr txBox="1"/>
+          <p:nvPr/>
+        </p:nvSpPr>
+        <p:spPr>
+          <a:xfrm>
+            <a:off x="5943600" y="1280160"/>
+            <a:ext cx="2743200" cy="320040"/>
+          </a:xfrm>
+          <a:prstGeom prst="rect">
+            <a:avLst/>
+          </a:prstGeom>
+          <a:noFill/>
+          <a:ln/>
+        </p:spPr>
+        <p:txBody>
+          <a:bodyPr wrap="square" lIns="0" tIns="0" rIns="0" bIns="0" rtlCol="0" anchor="ctr"/>
+          <a:lstStyle/>
+          <a:p>
+            <a:pPr indent="0" marL="0">
+              <a:buNone/>
+            </a:pPr>
+            <a:r>
+              <a:rPr lang="en-US" sz="1500" b="1" dirty="0">
                 <a:solidFill>
                   <a:srgbClr val="1B6B4A"/>
                 </a:solidFill>
-                <a:latin typeface="Cambria" pitchFamily="34" charset="0"/>
-                <a:ea typeface="Cambria" pitchFamily="34" charset="-122"/>
-                <a:cs typeface="Cambria" pitchFamily="34" charset="-120"/>
-              </a:rPr>
-              <a:t>6 900 ₸</a:t>
-            </a:r>
-            <a:endParaRPr lang="en-US" sz="4000" dirty="0"/>
-          </a:p>
-        </p:txBody>
-      </p:sp>
-      <p:sp>
-        <p:nvSpPr>
-          <p:cNvPr id="6" name="Text 4"/>
-          <p:cNvSpPr txBox="1"/>
-          <p:nvPr/>
-        </p:nvSpPr>
-        <p:spPr>
-          <a:xfrm>
-            <a:off x="822960" y="2286000"/>
-            <a:ext cx="3383280" cy="274320"/>
+                <a:latin typeface="Calibri" pitchFamily="34" charset="0"/>
+                <a:ea typeface="Calibri" pitchFamily="34" charset="-122"/>
+                <a:cs typeface="Calibri" pitchFamily="34" charset="-120"/>
+              </a:rPr>
+              <a:t>70 000 ₸ арзан</a:t>
+            </a:r>
+            <a:endParaRPr lang="en-US" sz="1500" dirty="0"/>
+          </a:p>
+        </p:txBody>
+      </p:sp>
+      <p:sp>
+        <p:nvSpPr>
+          <p:cNvPr id="6" name="Text 3"/>
+          <p:cNvSpPr txBox="1"/>
+          <p:nvPr/>
+        </p:nvSpPr>
+        <p:spPr>
+          <a:xfrm>
+            <a:off x="5943600" y="1600200"/>
+            <a:ext cx="2743200" cy="320040"/>
           </a:xfrm>
           <a:prstGeom prst="rect">
             <a:avLst/>
@@ -9261,7 +10071,7 @@
                 <a:ea typeface="Calibri" pitchFamily="34" charset="-122"/>
                 <a:cs typeface="Calibri" pitchFamily="34" charset="-120"/>
               </a:rPr>
-              <a:t>айына · 1 дүкен, 1 касса</a:t>
+              <a:t>Бірінші жылда — UMAG-пен салыстырғанда</a:t>
             </a:r>
             <a:endParaRPr lang="en-US" sz="1200" dirty="0"/>
           </a:p>
@@ -9269,492 +10079,233 @@
       </p:sp>
       <p:sp>
         <p:nvSpPr>
-          <p:cNvPr id="7" name="Text 5"/>
-          <p:cNvSpPr txBox="1"/>
-          <p:nvPr/>
-        </p:nvSpPr>
-        <p:spPr>
-          <a:xfrm>
-            <a:off x="822960" y="2697480"/>
-            <a:ext cx="3383280" cy="1828800"/>
-          </a:xfrm>
-          <a:prstGeom prst="rect">
-            <a:avLst/>
-          </a:prstGeom>
-          <a:noFill/>
-          <a:ln/>
-        </p:spPr>
-        <p:txBody>
-          <a:bodyPr wrap="square" lIns="0" tIns="0" rIns="0" bIns="0" rtlCol="0" anchor="ctr"/>
-          <a:lstStyle/>
-          <a:p>
-            <a:pPr marL="342900" indent="-342900">
-              <a:spcAft>
-                <a:spcPts val="500"/>
-              </a:spcAft>
-              <a:buSzPct val="100000"/>
-              <a:buChar char="•"/>
+          <p:cNvPr id="7" name="Text 4"/>
+          <p:cNvSpPr txBox="1"/>
+          <p:nvPr/>
+        </p:nvSpPr>
+        <p:spPr>
+          <a:xfrm>
+            <a:off x="5943600" y="2103120"/>
+            <a:ext cx="2743200" cy="320040"/>
+          </a:xfrm>
+          <a:prstGeom prst="rect">
+            <a:avLst/>
+          </a:prstGeom>
+          <a:noFill/>
+          <a:ln/>
+        </p:spPr>
+        <p:txBody>
+          <a:bodyPr wrap="square" lIns="0" tIns="0" rIns="0" bIns="0" rtlCol="0" anchor="ctr"/>
+          <a:lstStyle/>
+          <a:p>
+            <a:pPr indent="0" marL="0">
+              <a:buNone/>
+            </a:pPr>
+            <a:r>
+              <a:rPr lang="en-US" sz="1500" b="1" dirty="0">
+                <a:solidFill>
+                  <a:srgbClr val="1B6B4A"/>
+                </a:solidFill>
+                <a:latin typeface="Calibri" pitchFamily="34" charset="0"/>
+                <a:ea typeface="Calibri" pitchFamily="34" charset="-122"/>
+                <a:cs typeface="Calibri" pitchFamily="34" charset="-120"/>
+              </a:rPr>
+              <a:t>Орнату 20 000 ₸</a:t>
+            </a:r>
+            <a:endParaRPr lang="en-US" sz="1500" dirty="0"/>
+          </a:p>
+        </p:txBody>
+      </p:sp>
+      <p:sp>
+        <p:nvSpPr>
+          <p:cNvPr id="8" name="Text 5"/>
+          <p:cNvSpPr txBox="1"/>
+          <p:nvPr/>
+        </p:nvSpPr>
+        <p:spPr>
+          <a:xfrm>
+            <a:off x="5943600" y="2423160"/>
+            <a:ext cx="2743200" cy="320040"/>
+          </a:xfrm>
+          <a:prstGeom prst="rect">
+            <a:avLst/>
+          </a:prstGeom>
+          <a:noFill/>
+          <a:ln/>
+        </p:spPr>
+        <p:txBody>
+          <a:bodyPr wrap="square" lIns="0" tIns="0" rIns="0" bIns="0" rtlCol="0" anchor="ctr"/>
+          <a:lstStyle/>
+          <a:p>
+            <a:pPr indent="0" marL="0">
+              <a:buNone/>
             </a:pPr>
             <a:r>
               <a:rPr lang="en-US" sz="1200" dirty="0">
                 <a:solidFill>
-                  <a:srgbClr val="1A1A1A"/>
-                </a:solidFill>
-                <a:latin typeface="Calibri" pitchFamily="34" charset="0"/>
-                <a:ea typeface="Calibri" pitchFamily="34" charset="-122"/>
-                <a:cs typeface="Calibri" pitchFamily="34" charset="-120"/>
-              </a:rPr>
-              <a:t>Касса: сатылым, қайтарым, ауысым</a:t>
+                  <a:srgbClr val="6B7770"/>
+                </a:solidFill>
+                <a:latin typeface="Calibri" pitchFamily="34" charset="0"/>
+                <a:ea typeface="Calibri" pitchFamily="34" charset="-122"/>
+                <a:cs typeface="Calibri" pitchFamily="34" charset="-120"/>
+              </a:rPr>
+              <a:t>UMAG: 30 000 ₸ — 10 000 үнемдейсіз</a:t>
             </a:r>
             <a:endParaRPr lang="en-US" sz="1200" dirty="0"/>
           </a:p>
-          <a:p>
-            <a:pPr marL="342900" indent="-342900">
-              <a:spcAft>
-                <a:spcPts val="500"/>
-              </a:spcAft>
-              <a:buSzPct val="100000"/>
-              <a:buChar char="•"/>
+        </p:txBody>
+      </p:sp>
+      <p:sp>
+        <p:nvSpPr>
+          <p:cNvPr id="9" name="Text 6"/>
+          <p:cNvSpPr txBox="1"/>
+          <p:nvPr/>
+        </p:nvSpPr>
+        <p:spPr>
+          <a:xfrm>
+            <a:off x="5943600" y="2926080"/>
+            <a:ext cx="2743200" cy="320040"/>
+          </a:xfrm>
+          <a:prstGeom prst="rect">
+            <a:avLst/>
+          </a:prstGeom>
+          <a:noFill/>
+          <a:ln/>
+        </p:spPr>
+        <p:txBody>
+          <a:bodyPr wrap="square" lIns="0" tIns="0" rIns="0" bIns="0" rtlCol="0" anchor="ctr"/>
+          <a:lstStyle/>
+          <a:p>
+            <a:pPr indent="0" marL="0">
+              <a:buNone/>
+            </a:pPr>
+            <a:r>
+              <a:rPr lang="en-US" sz="1500" b="1" dirty="0">
+                <a:solidFill>
+                  <a:srgbClr val="1B6B4A"/>
+                </a:solidFill>
+                <a:latin typeface="Calibri" pitchFamily="34" charset="0"/>
+                <a:ea typeface="Calibri" pitchFamily="34" charset="-122"/>
+                <a:cs typeface="Calibri" pitchFamily="34" charset="-120"/>
+              </a:rPr>
+              <a:t>Кассирге шек жоқ</a:t>
+            </a:r>
+            <a:endParaRPr lang="en-US" sz="1500" dirty="0"/>
+          </a:p>
+        </p:txBody>
+      </p:sp>
+      <p:sp>
+        <p:nvSpPr>
+          <p:cNvPr id="10" name="Text 7"/>
+          <p:cNvSpPr txBox="1"/>
+          <p:nvPr/>
+        </p:nvSpPr>
+        <p:spPr>
+          <a:xfrm>
+            <a:off x="5943600" y="3246120"/>
+            <a:ext cx="2743200" cy="320040"/>
+          </a:xfrm>
+          <a:prstGeom prst="rect">
+            <a:avLst/>
+          </a:prstGeom>
+          <a:noFill/>
+          <a:ln/>
+        </p:spPr>
+        <p:txBody>
+          <a:bodyPr wrap="square" lIns="0" tIns="0" rIns="0" bIns="0" rtlCol="0" anchor="ctr"/>
+          <a:lstStyle/>
+          <a:p>
+            <a:pPr indent="0" marL="0">
+              <a:buNone/>
             </a:pPr>
             <a:r>
               <a:rPr lang="en-US" sz="1200" dirty="0">
                 <a:solidFill>
-                  <a:srgbClr val="1A1A1A"/>
-                </a:solidFill>
-                <a:latin typeface="Calibri" pitchFamily="34" charset="0"/>
-                <a:ea typeface="Calibri" pitchFamily="34" charset="-122"/>
-                <a:cs typeface="Calibri" pitchFamily="34" charset="-120"/>
-              </a:rPr>
-              <a:t>Тауарлар мен қойма</a:t>
+                  <a:srgbClr val="6B7770"/>
+                </a:solidFill>
+                <a:latin typeface="Calibri" pitchFamily="34" charset="0"/>
+                <a:ea typeface="Calibri" pitchFamily="34" charset="-122"/>
+                <a:cs typeface="Calibri" pitchFamily="34" charset="-120"/>
+              </a:rPr>
+              <a:t>Wipon: қызметкер санына тариф</a:t>
             </a:r>
             <a:endParaRPr lang="en-US" sz="1200" dirty="0"/>
           </a:p>
-          <a:p>
-            <a:pPr marL="342900" indent="-342900">
-              <a:spcAft>
-                <a:spcPts val="500"/>
-              </a:spcAft>
-              <a:buSzPct val="100000"/>
-              <a:buChar char="•"/>
+        </p:txBody>
+      </p:sp>
+      <p:sp>
+        <p:nvSpPr>
+          <p:cNvPr id="11" name="Text 8"/>
+          <p:cNvSpPr txBox="1"/>
+          <p:nvPr/>
+        </p:nvSpPr>
+        <p:spPr>
+          <a:xfrm>
+            <a:off x="5943600" y="3749040"/>
+            <a:ext cx="2743200" cy="320040"/>
+          </a:xfrm>
+          <a:prstGeom prst="rect">
+            <a:avLst/>
+          </a:prstGeom>
+          <a:noFill/>
+          <a:ln/>
+        </p:spPr>
+        <p:txBody>
+          <a:bodyPr wrap="square" lIns="0" tIns="0" rIns="0" bIns="0" rtlCol="0" anchor="ctr"/>
+          <a:lstStyle/>
+          <a:p>
+            <a:pPr indent="0" marL="0">
+              <a:buNone/>
+            </a:pPr>
+            <a:r>
+              <a:rPr lang="en-US" sz="1500" b="1" dirty="0">
+                <a:solidFill>
+                  <a:srgbClr val="1B6B4A"/>
+                </a:solidFill>
+                <a:latin typeface="Calibri" pitchFamily="34" charset="0"/>
+                <a:ea typeface="Calibri" pitchFamily="34" charset="-122"/>
+                <a:cs typeface="Calibri" pitchFamily="34" charset="-120"/>
+              </a:rPr>
+              <a:t>AI кіреді</a:t>
+            </a:r>
+            <a:endParaRPr lang="en-US" sz="1500" dirty="0"/>
+          </a:p>
+        </p:txBody>
+      </p:sp>
+      <p:sp>
+        <p:nvSpPr>
+          <p:cNvPr id="12" name="Text 9"/>
+          <p:cNvSpPr txBox="1"/>
+          <p:nvPr/>
+        </p:nvSpPr>
+        <p:spPr>
+          <a:xfrm>
+            <a:off x="5943600" y="4069080"/>
+            <a:ext cx="2743200" cy="320040"/>
+          </a:xfrm>
+          <a:prstGeom prst="rect">
+            <a:avLst/>
+          </a:prstGeom>
+          <a:noFill/>
+          <a:ln/>
+        </p:spPr>
+        <p:txBody>
+          <a:bodyPr wrap="square" lIns="0" tIns="0" rIns="0" bIns="0" rtlCol="0" anchor="ctr"/>
+          <a:lstStyle/>
+          <a:p>
+            <a:pPr indent="0" marL="0">
+              <a:buNone/>
             </a:pPr>
             <a:r>
               <a:rPr lang="en-US" sz="1200" dirty="0">
                 <a:solidFill>
-                  <a:srgbClr val="1A1A1A"/>
-                </a:solidFill>
-                <a:latin typeface="Calibri" pitchFamily="34" charset="0"/>
-                <a:ea typeface="Calibri" pitchFamily="34" charset="-122"/>
-                <a:cs typeface="Calibri" pitchFamily="34" charset="-120"/>
-              </a:rPr>
-              <a:t>Есептер мен көрсеткіштер</a:t>
-            </a:r>
-            <a:endParaRPr lang="en-US" sz="1200" dirty="0"/>
-          </a:p>
-          <a:p>
-            <a:pPr marL="342900" indent="-342900">
-              <a:spcAft>
-                <a:spcPts val="500"/>
-              </a:spcAft>
-              <a:buSzPct val="100000"/>
-              <a:buChar char="•"/>
-            </a:pPr>
-            <a:r>
-              <a:rPr lang="en-US" sz="1200" dirty="0">
-                <a:solidFill>
-                  <a:srgbClr val="1A1A1A"/>
-                </a:solidFill>
-                <a:latin typeface="Calibri" pitchFamily="34" charset="0"/>
-                <a:ea typeface="Calibri" pitchFamily="34" charset="-122"/>
-                <a:cs typeface="Calibri" pitchFamily="34" charset="-120"/>
-              </a:rPr>
-              <a:t>Адалдық және қарыз</a:t>
-            </a:r>
-            <a:endParaRPr lang="en-US" sz="1200" dirty="0"/>
-          </a:p>
-          <a:p>
-            <a:pPr marL="342900" indent="-342900">
-              <a:spcAft>
-                <a:spcPts val="500"/>
-              </a:spcAft>
-              <a:buSzPct val="100000"/>
-              <a:buChar char="•"/>
-            </a:pPr>
-            <a:r>
-              <a:rPr lang="en-US" sz="1200" dirty="0">
-                <a:solidFill>
-                  <a:srgbClr val="1A1A1A"/>
-                </a:solidFill>
-                <a:latin typeface="Calibri" pitchFamily="34" charset="0"/>
-                <a:ea typeface="Calibri" pitchFamily="34" charset="-122"/>
-                <a:cs typeface="Calibri" pitchFamily="34" charset="-120"/>
-              </a:rPr>
-              <a:t>Телефон қосымшасы</a:t>
-            </a:r>
-            <a:endParaRPr lang="en-US" sz="1200" dirty="0"/>
-          </a:p>
-        </p:txBody>
-      </p:sp>
-      <p:sp>
-        <p:nvSpPr>
-          <p:cNvPr id="8" name="Shape 6"/>
-          <p:cNvSpPr/>
-          <p:nvPr/>
-        </p:nvSpPr>
-        <p:spPr>
-          <a:xfrm>
-            <a:off x="4663440" y="1097280"/>
-            <a:ext cx="3931920" cy="3566160"/>
-          </a:xfrm>
-          <a:prstGeom prst="roundRect">
-            <a:avLst>
-              <a:gd name="adj" fmla="val 3077"/>
-            </a:avLst>
-          </a:prstGeom>
-          <a:solidFill>
-            <a:srgbClr val="0F3D2E"/>
-          </a:solidFill>
-          <a:ln/>
-        </p:spPr>
-      </p:sp>
-      <p:sp>
-        <p:nvSpPr>
-          <p:cNvPr id="9" name="Shape 7"/>
-          <p:cNvSpPr/>
-          <p:nvPr/>
-        </p:nvSpPr>
-        <p:spPr>
-          <a:xfrm>
-            <a:off x="6766560" y="1234440"/>
-            <a:ext cx="1691640" cy="320040"/>
-          </a:xfrm>
-          <a:prstGeom prst="roundRect">
-            <a:avLst>
-              <a:gd name="adj" fmla="val 48571"/>
-            </a:avLst>
-          </a:prstGeom>
-          <a:solidFill>
-            <a:srgbClr val="C9A227"/>
-          </a:solidFill>
-          <a:ln/>
-        </p:spPr>
-      </p:sp>
-      <p:sp>
-        <p:nvSpPr>
-          <p:cNvPr id="10" name="Text 8"/>
-          <p:cNvSpPr txBox="1"/>
-          <p:nvPr/>
-        </p:nvSpPr>
-        <p:spPr>
-          <a:xfrm>
-            <a:off x="6766560" y="1234440"/>
-            <a:ext cx="1691640" cy="320040"/>
-          </a:xfrm>
-          <a:prstGeom prst="rect">
-            <a:avLst/>
-          </a:prstGeom>
-          <a:noFill/>
-          <a:ln/>
-        </p:spPr>
-        <p:txBody>
-          <a:bodyPr wrap="square" lIns="0" tIns="0" rIns="0" bIns="0" rtlCol="0" anchor="ctr"/>
-          <a:lstStyle/>
-          <a:p>
-            <a:pPr algn="ctr" indent="0" marL="0">
-              <a:buNone/>
-            </a:pPr>
-            <a:r>
-              <a:rPr lang="en-US" sz="1000" b="1" dirty="0">
-                <a:solidFill>
-                  <a:srgbClr val="0F3D2E"/>
-                </a:solidFill>
-                <a:latin typeface="Calibri" pitchFamily="34" charset="0"/>
-                <a:ea typeface="Calibri" pitchFamily="34" charset="-122"/>
-                <a:cs typeface="Calibri" pitchFamily="34" charset="-120"/>
-              </a:rPr>
-              <a:t>ҰСЫНАМЫЗ</a:t>
-            </a:r>
-            <a:endParaRPr lang="en-US" sz="1000" dirty="0"/>
-          </a:p>
-        </p:txBody>
-      </p:sp>
-      <p:sp>
-        <p:nvSpPr>
-          <p:cNvPr id="11" name="Text 9"/>
-          <p:cNvSpPr txBox="1"/>
-          <p:nvPr/>
-        </p:nvSpPr>
-        <p:spPr>
-          <a:xfrm>
-            <a:off x="4937760" y="1280160"/>
-            <a:ext cx="1828800" cy="365760"/>
-          </a:xfrm>
-          <a:prstGeom prst="rect">
-            <a:avLst/>
-          </a:prstGeom>
-          <a:noFill/>
-          <a:ln/>
-        </p:spPr>
-        <p:txBody>
-          <a:bodyPr wrap="square" lIns="0" tIns="0" rIns="0" bIns="0" rtlCol="0" anchor="ctr"/>
-          <a:lstStyle/>
-          <a:p>
-            <a:pPr indent="0" marL="0">
-              <a:buNone/>
-            </a:pPr>
-            <a:r>
-              <a:rPr lang="en-US" sz="2000" b="1" dirty="0">
-                <a:solidFill>
-                  <a:srgbClr val="FFFFFF"/>
-                </a:solidFill>
-                <a:latin typeface="Calibri" pitchFamily="34" charset="0"/>
-                <a:ea typeface="Calibri" pitchFamily="34" charset="-122"/>
-                <a:cs typeface="Calibri" pitchFamily="34" charset="-120"/>
-              </a:rPr>
-              <a:t>Стандарт</a:t>
-            </a:r>
-            <a:endParaRPr lang="en-US" sz="2000" dirty="0"/>
-          </a:p>
-        </p:txBody>
-      </p:sp>
-      <p:sp>
-        <p:nvSpPr>
-          <p:cNvPr id="12" name="Text 10"/>
-          <p:cNvSpPr txBox="1"/>
-          <p:nvPr/>
-        </p:nvSpPr>
-        <p:spPr>
-          <a:xfrm>
-            <a:off x="4937760" y="1645920"/>
-            <a:ext cx="3383280" cy="640080"/>
-          </a:xfrm>
-          <a:prstGeom prst="rect">
-            <a:avLst/>
-          </a:prstGeom>
-          <a:noFill/>
-          <a:ln/>
-        </p:spPr>
-        <p:txBody>
-          <a:bodyPr wrap="square" lIns="0" tIns="0" rIns="0" bIns="0" rtlCol="0" anchor="ctr"/>
-          <a:lstStyle/>
-          <a:p>
-            <a:pPr indent="0" marL="0">
-              <a:buNone/>
-            </a:pPr>
-            <a:r>
-              <a:rPr lang="en-US" sz="4000" b="1" dirty="0">
-                <a:solidFill>
-                  <a:srgbClr val="C9A227"/>
-                </a:solidFill>
-                <a:latin typeface="Cambria" pitchFamily="34" charset="0"/>
-                <a:ea typeface="Cambria" pitchFamily="34" charset="-122"/>
-                <a:cs typeface="Cambria" pitchFamily="34" charset="-120"/>
-              </a:rPr>
-              <a:t>14 900 ₸</a:t>
-            </a:r>
-            <a:endParaRPr lang="en-US" sz="4000" dirty="0"/>
-          </a:p>
-        </p:txBody>
-      </p:sp>
-      <p:sp>
-        <p:nvSpPr>
-          <p:cNvPr id="13" name="Text 11"/>
-          <p:cNvSpPr txBox="1"/>
-          <p:nvPr/>
-        </p:nvSpPr>
-        <p:spPr>
-          <a:xfrm>
-            <a:off x="4937760" y="2286000"/>
-            <a:ext cx="3383280" cy="274320"/>
-          </a:xfrm>
-          <a:prstGeom prst="rect">
-            <a:avLst/>
-          </a:prstGeom>
-          <a:noFill/>
-          <a:ln/>
-        </p:spPr>
-        <p:txBody>
-          <a:bodyPr wrap="square" lIns="0" tIns="0" rIns="0" bIns="0" rtlCol="0" anchor="ctr"/>
-          <a:lstStyle/>
-          <a:p>
-            <a:pPr indent="0" marL="0">
-              <a:buNone/>
-            </a:pPr>
-            <a:r>
-              <a:rPr lang="en-US" sz="1200" dirty="0">
-                <a:solidFill>
-                  <a:srgbClr val="B8C9BF"/>
-                </a:solidFill>
-                <a:latin typeface="Calibri" pitchFamily="34" charset="0"/>
-                <a:ea typeface="Calibri" pitchFamily="34" charset="-122"/>
-                <a:cs typeface="Calibri" pitchFamily="34" charset="-120"/>
-              </a:rPr>
-              <a:t>айына · 1 дүкен, кассалар шексіз</a:t>
-            </a:r>
-            <a:endParaRPr lang="en-US" sz="1200" dirty="0"/>
-          </a:p>
-        </p:txBody>
-      </p:sp>
-      <p:sp>
-        <p:nvSpPr>
-          <p:cNvPr id="14" name="Text 12"/>
-          <p:cNvSpPr txBox="1"/>
-          <p:nvPr/>
-        </p:nvSpPr>
-        <p:spPr>
-          <a:xfrm>
-            <a:off x="4937760" y="2697480"/>
-            <a:ext cx="3383280" cy="1828800"/>
-          </a:xfrm>
-          <a:prstGeom prst="rect">
-            <a:avLst/>
-          </a:prstGeom>
-          <a:noFill/>
-          <a:ln/>
-        </p:spPr>
-        <p:txBody>
-          <a:bodyPr wrap="square" lIns="0" tIns="0" rIns="0" bIns="0" rtlCol="0" anchor="ctr"/>
-          <a:lstStyle/>
-          <a:p>
-            <a:pPr marL="342900" indent="-342900">
-              <a:spcAft>
-                <a:spcPts val="500"/>
-              </a:spcAft>
-              <a:buSzPct val="100000"/>
-              <a:buChar char="•"/>
-            </a:pPr>
-            <a:r>
-              <a:rPr lang="en-US" sz="1200" dirty="0">
-                <a:solidFill>
-                  <a:srgbClr val="FFFFFF"/>
-                </a:solidFill>
-                <a:latin typeface="Calibri" pitchFamily="34" charset="0"/>
-                <a:ea typeface="Calibri" pitchFamily="34" charset="-122"/>
-                <a:cs typeface="Calibri" pitchFamily="34" charset="-120"/>
-              </a:rPr>
-              <a:t>Старттағының бәрі</a:t>
-            </a:r>
-            <a:endParaRPr lang="en-US" sz="1200" dirty="0"/>
-          </a:p>
-          <a:p>
-            <a:pPr marL="342900" indent="-342900">
-              <a:spcAft>
-                <a:spcPts val="500"/>
-              </a:spcAft>
-              <a:buSzPct val="100000"/>
-              <a:buChar char="•"/>
-            </a:pPr>
-            <a:r>
-              <a:rPr lang="en-US" sz="1200" dirty="0">
-                <a:solidFill>
-                  <a:srgbClr val="FFFFFF"/>
-                </a:solidFill>
-                <a:latin typeface="Calibri" pitchFamily="34" charset="0"/>
-                <a:ea typeface="Calibri" pitchFamily="34" charset="-122"/>
-                <a:cs typeface="Calibri" pitchFamily="34" charset="-120"/>
-              </a:rPr>
-              <a:t>AI: накладной, дауыспен түгендеу</a:t>
-            </a:r>
-            <a:endParaRPr lang="en-US" sz="1200" dirty="0"/>
-          </a:p>
-          <a:p>
-            <a:pPr marL="342900" indent="-342900">
-              <a:spcAft>
-                <a:spcPts val="500"/>
-              </a:spcAft>
-              <a:buSzPct val="100000"/>
-              <a:buChar char="•"/>
-            </a:pPr>
-            <a:r>
-              <a:rPr lang="en-US" sz="1200" dirty="0">
-                <a:solidFill>
-                  <a:srgbClr val="FFFFFF"/>
-                </a:solidFill>
-                <a:latin typeface="Calibri" pitchFamily="34" charset="0"/>
-                <a:ea typeface="Calibri" pitchFamily="34" charset="-122"/>
-                <a:cs typeface="Calibri" pitchFamily="34" charset="-120"/>
-              </a:rPr>
-              <a:t>Kaspi дүкен, салық, жалақы</a:t>
-            </a:r>
-            <a:endParaRPr lang="en-US" sz="1200" dirty="0"/>
-          </a:p>
-          <a:p>
-            <a:pPr marL="342900" indent="-342900">
-              <a:spcAft>
-                <a:spcPts val="500"/>
-              </a:spcAft>
-              <a:buSzPct val="100000"/>
-              <a:buChar char="•"/>
-            </a:pPr>
-            <a:r>
-              <a:rPr lang="en-US" sz="1200" dirty="0">
-                <a:solidFill>
-                  <a:srgbClr val="FFFFFF"/>
-                </a:solidFill>
-                <a:latin typeface="Calibri" pitchFamily="34" charset="0"/>
-                <a:ea typeface="Calibri" pitchFamily="34" charset="-122"/>
-                <a:cs typeface="Calibri" pitchFamily="34" charset="-120"/>
-              </a:rPr>
-              <a:t>Таңбалау, акциз, көтерме</a:t>
-            </a:r>
-            <a:endParaRPr lang="en-US" sz="1200" dirty="0"/>
-          </a:p>
-          <a:p>
-            <a:pPr marL="342900" indent="-342900">
-              <a:spcAft>
-                <a:spcPts val="500"/>
-              </a:spcAft>
-              <a:buSzPct val="100000"/>
-              <a:buChar char="•"/>
-            </a:pPr>
-            <a:r>
-              <a:rPr lang="en-US" sz="1200" dirty="0">
-                <a:solidFill>
-                  <a:srgbClr val="FFFFFF"/>
-                </a:solidFill>
-                <a:latin typeface="Calibri" pitchFamily="34" charset="0"/>
-                <a:ea typeface="Calibri" pitchFamily="34" charset="-122"/>
-                <a:cs typeface="Calibri" pitchFamily="34" charset="-120"/>
-              </a:rPr>
-              <a:t>Автоматтандыру және API</a:t>
-            </a:r>
-            <a:endParaRPr lang="en-US" sz="1200" dirty="0"/>
-          </a:p>
-        </p:txBody>
-      </p:sp>
-      <p:sp>
-        <p:nvSpPr>
-          <p:cNvPr id="15" name="Text 13"/>
-          <p:cNvSpPr txBox="1"/>
-          <p:nvPr/>
-        </p:nvSpPr>
-        <p:spPr>
-          <a:xfrm>
-            <a:off x="548640" y="4754880"/>
-            <a:ext cx="8229600" cy="274320"/>
-          </a:xfrm>
-          <a:prstGeom prst="rect">
-            <a:avLst/>
-          </a:prstGeom>
-          <a:noFill/>
-          <a:ln/>
-        </p:spPr>
-        <p:txBody>
-          <a:bodyPr wrap="square" lIns="0" tIns="0" rIns="0" bIns="0" rtlCol="0" anchor="ctr"/>
-          <a:lstStyle/>
-          <a:p>
-            <a:pPr algn="ctr" indent="0" marL="0">
-              <a:buNone/>
-            </a:pPr>
-            <a:r>
-              <a:rPr lang="en-US" sz="1200" dirty="0">
-                <a:solidFill>
                   <a:srgbClr val="6B7770"/>
                 </a:solidFill>
                 <a:latin typeface="Calibri" pitchFamily="34" charset="0"/>
                 <a:ea typeface="Calibri" pitchFamily="34" charset="-122"/>
                 <a:cs typeface="Calibri" pitchFamily="34" charset="-120"/>
               </a:rPr>
-              <a:t>Қосымша дүкен — 4 900 ₸ · Жылға төлесеңіз — 2 ай сыйлық</a:t>
+              <a:t>Бәсекелестерде мүлде жоқ</a:t>
             </a:r>
             <a:endParaRPr lang="en-US" sz="1200" dirty="0"/>
           </a:p>
